--- a/03-课件PPT/讲次版/第6章-2-讲次 6-2 · 性能与成本优化.pptx
+++ b/03-课件PPT/讲次版/第6章-2-讲次 6-2 · 性能与成本优化.pptx
@@ -3897,14 +3897,641 @@
       </p:sp>
       <p:sp>
         <p:nvSpPr>
-          <p:cNvPr id="5" name="TextBox 4"/>
+          <p:cNvPr id="5" name="Rounded Rectangle 4"/>
+          <p:cNvSpPr/>
+          <p:nvPr/>
+        </p:nvSpPr>
+        <p:spPr>
+          <a:xfrm>
+            <a:off x="1047750" y="1905000"/>
+            <a:ext cx="3175000" cy="2857500"/>
+          </a:xfrm>
+          <a:prstGeom prst="roundRect">
+            <a:avLst>
+              <a:gd name="adj" fmla="val 8000"/>
+            </a:avLst>
+          </a:prstGeom>
+          <a:solidFill>
+            <a:srgbClr val="FFFFFF"/>
+          </a:solidFill>
+          <a:ln w="12700">
+            <a:solidFill>
+              <a:srgbClr val="DDE5EE"/>
+            </a:solidFill>
+          </a:ln>
+          <a:effectLst/>
+        </p:spPr>
+        <p:style>
+          <a:lnRef idx="1">
+            <a:schemeClr val="accent1"/>
+          </a:lnRef>
+          <a:fillRef idx="3">
+            <a:schemeClr val="accent1"/>
+          </a:fillRef>
+          <a:effectRef idx="2">
+            <a:schemeClr val="accent1"/>
+          </a:effectRef>
+          <a:fontRef idx="minor">
+            <a:schemeClr val="lt1"/>
+          </a:fontRef>
+        </p:style>
+        <p:txBody>
+          <a:bodyPr rtlCol="0" anchor="ctr"/>
+          <a:lstStyle/>
+          <a:p>
+            <a:pPr algn="ctr"/>
+          </a:p>
+        </p:txBody>
+      </p:sp>
+      <p:sp>
+        <p:nvSpPr>
+          <p:cNvPr id="6" name="Rectangle 5"/>
+          <p:cNvSpPr/>
+          <p:nvPr/>
+        </p:nvSpPr>
+        <p:spPr>
+          <a:xfrm>
+            <a:off x="1047750" y="1905000"/>
+            <a:ext cx="3175000" cy="76200"/>
+          </a:xfrm>
+          <a:prstGeom prst="rect">
+            <a:avLst/>
+          </a:prstGeom>
+          <a:solidFill>
+            <a:srgbClr val="2563EB"/>
+          </a:solidFill>
+          <a:ln>
+            <a:noFill/>
+          </a:ln>
+          <a:effectLst/>
+        </p:spPr>
+        <p:style>
+          <a:lnRef idx="1">
+            <a:schemeClr val="accent1"/>
+          </a:lnRef>
+          <a:fillRef idx="3">
+            <a:schemeClr val="accent1"/>
+          </a:fillRef>
+          <a:effectRef idx="2">
+            <a:schemeClr val="accent1"/>
+          </a:effectRef>
+          <a:fontRef idx="minor">
+            <a:schemeClr val="lt1"/>
+          </a:fontRef>
+        </p:style>
+        <p:txBody>
+          <a:bodyPr rtlCol="0" anchor="ctr"/>
+          <a:lstStyle/>
+          <a:p>
+            <a:pPr algn="ctr"/>
+          </a:p>
+        </p:txBody>
+      </p:sp>
+      <p:sp>
+        <p:nvSpPr>
+          <p:cNvPr id="7" name="TextBox 6"/>
           <p:cNvSpPr txBox="1"/>
           <p:nvPr/>
         </p:nvSpPr>
         <p:spPr>
           <a:xfrm>
-            <a:off x="9334500" y="0"/>
-            <a:ext cx="2667000" cy="704850"/>
+            <a:off x="1047750" y="2286000"/>
+            <a:ext cx="3175000" cy="1047750"/>
+          </a:xfrm>
+          <a:prstGeom prst="rect">
+            <a:avLst/>
+          </a:prstGeom>
+          <a:noFill/>
+        </p:spPr>
+        <p:txBody>
+          <a:bodyPr wrap="square" anchor="ctr">
+            <a:spAutoFit/>
+          </a:bodyPr>
+          <a:lstStyle/>
+          <a:p>
+            <a:pPr algn="ctr">
+              <a:lnSpc>
+                <a:spcPct val="100000"/>
+              </a:lnSpc>
+            </a:pPr>
+            <a:r>
+              <a:rPr sz="4000" b="1">
+                <a:solidFill>
+                  <a:srgbClr val="2563EB"/>
+                </a:solidFill>
+                <a:latin typeface="PingFang SC"/>
+              </a:rPr>
+              <a:t>0.92</a:t>
+            </a:r>
+          </a:p>
+        </p:txBody>
+      </p:sp>
+      <p:sp>
+        <p:nvSpPr>
+          <p:cNvPr id="8" name="TextBox 7"/>
+          <p:cNvSpPr txBox="1"/>
+          <p:nvPr/>
+        </p:nvSpPr>
+        <p:spPr>
+          <a:xfrm>
+            <a:off x="1047750" y="3333750"/>
+            <a:ext cx="3175000" cy="323850"/>
+          </a:xfrm>
+          <a:prstGeom prst="rect">
+            <a:avLst/>
+          </a:prstGeom>
+          <a:noFill/>
+        </p:spPr>
+        <p:txBody>
+          <a:bodyPr wrap="square" anchor="ctr">
+            <a:spAutoFit/>
+          </a:bodyPr>
+          <a:lstStyle/>
+          <a:p>
+            <a:pPr algn="ctr">
+              <a:lnSpc>
+                <a:spcPct val="100000"/>
+              </a:lnSpc>
+            </a:pPr>
+            <a:r>
+              <a:rPr sz="1300" b="0">
+                <a:solidFill>
+                  <a:srgbClr val="94A3B8"/>
+                </a:solidFill>
+                <a:latin typeface="PingFang SC"/>
+              </a:rPr>
+              <a:t>τ</a:t>
+            </a:r>
+          </a:p>
+        </p:txBody>
+      </p:sp>
+      <p:sp>
+        <p:nvSpPr>
+          <p:cNvPr id="9" name="TextBox 8"/>
+          <p:cNvSpPr txBox="1"/>
+          <p:nvPr/>
+        </p:nvSpPr>
+        <p:spPr>
+          <a:xfrm>
+            <a:off x="1200150" y="4057650"/>
+            <a:ext cx="2870200" cy="571500"/>
+          </a:xfrm>
+          <a:prstGeom prst="rect">
+            <a:avLst/>
+          </a:prstGeom>
+          <a:noFill/>
+        </p:spPr>
+        <p:txBody>
+          <a:bodyPr wrap="square" anchor="ctr">
+            <a:spAutoFit/>
+          </a:bodyPr>
+          <a:lstStyle/>
+          <a:p>
+            <a:pPr algn="ctr">
+              <a:lnSpc>
+                <a:spcPct val="100000"/>
+              </a:lnSpc>
+            </a:pPr>
+            <a:r>
+              <a:rPr sz="1300" b="1">
+                <a:solidFill>
+                  <a:srgbClr val="475569"/>
+                </a:solidFill>
+                <a:latin typeface="PingFang SC"/>
+              </a:rPr>
+              <a:t>相似阈值</a:t>
+            </a:r>
+          </a:p>
+        </p:txBody>
+      </p:sp>
+      <p:sp>
+        <p:nvSpPr>
+          <p:cNvPr id="10" name="Rounded Rectangle 9"/>
+          <p:cNvSpPr/>
+          <p:nvPr/>
+        </p:nvSpPr>
+        <p:spPr>
+          <a:xfrm>
+            <a:off x="4508500" y="1905000"/>
+            <a:ext cx="3175000" cy="2857500"/>
+          </a:xfrm>
+          <a:prstGeom prst="roundRect">
+            <a:avLst>
+              <a:gd name="adj" fmla="val 8000"/>
+            </a:avLst>
+          </a:prstGeom>
+          <a:solidFill>
+            <a:srgbClr val="FFFFFF"/>
+          </a:solidFill>
+          <a:ln w="12700">
+            <a:solidFill>
+              <a:srgbClr val="DDE5EE"/>
+            </a:solidFill>
+          </a:ln>
+          <a:effectLst/>
+        </p:spPr>
+        <p:style>
+          <a:lnRef idx="1">
+            <a:schemeClr val="accent1"/>
+          </a:lnRef>
+          <a:fillRef idx="3">
+            <a:schemeClr val="accent1"/>
+          </a:fillRef>
+          <a:effectRef idx="2">
+            <a:schemeClr val="accent1"/>
+          </a:effectRef>
+          <a:fontRef idx="minor">
+            <a:schemeClr val="lt1"/>
+          </a:fontRef>
+        </p:style>
+        <p:txBody>
+          <a:bodyPr rtlCol="0" anchor="ctr"/>
+          <a:lstStyle/>
+          <a:p>
+            <a:pPr algn="ctr"/>
+          </a:p>
+        </p:txBody>
+      </p:sp>
+      <p:sp>
+        <p:nvSpPr>
+          <p:cNvPr id="11" name="Rectangle 10"/>
+          <p:cNvSpPr/>
+          <p:nvPr/>
+        </p:nvSpPr>
+        <p:spPr>
+          <a:xfrm>
+            <a:off x="4508500" y="1905000"/>
+            <a:ext cx="3175000" cy="76200"/>
+          </a:xfrm>
+          <a:prstGeom prst="rect">
+            <a:avLst/>
+          </a:prstGeom>
+          <a:solidFill>
+            <a:srgbClr val="14B8A6"/>
+          </a:solidFill>
+          <a:ln>
+            <a:noFill/>
+          </a:ln>
+          <a:effectLst/>
+        </p:spPr>
+        <p:style>
+          <a:lnRef idx="1">
+            <a:schemeClr val="accent1"/>
+          </a:lnRef>
+          <a:fillRef idx="3">
+            <a:schemeClr val="accent1"/>
+          </a:fillRef>
+          <a:effectRef idx="2">
+            <a:schemeClr val="accent1"/>
+          </a:effectRef>
+          <a:fontRef idx="minor">
+            <a:schemeClr val="lt1"/>
+          </a:fontRef>
+        </p:style>
+        <p:txBody>
+          <a:bodyPr rtlCol="0" anchor="ctr"/>
+          <a:lstStyle/>
+          <a:p>
+            <a:pPr algn="ctr"/>
+          </a:p>
+        </p:txBody>
+      </p:sp>
+      <p:sp>
+        <p:nvSpPr>
+          <p:cNvPr id="12" name="TextBox 11"/>
+          <p:cNvSpPr txBox="1"/>
+          <p:nvPr/>
+        </p:nvSpPr>
+        <p:spPr>
+          <a:xfrm>
+            <a:off x="4508500" y="2286000"/>
+            <a:ext cx="3175000" cy="1047750"/>
+          </a:xfrm>
+          <a:prstGeom prst="rect">
+            <a:avLst/>
+          </a:prstGeom>
+          <a:noFill/>
+        </p:spPr>
+        <p:txBody>
+          <a:bodyPr wrap="square" anchor="ctr">
+            <a:spAutoFit/>
+          </a:bodyPr>
+          <a:lstStyle/>
+          <a:p>
+            <a:pPr algn="ctr">
+              <a:lnSpc>
+                <a:spcPct val="100000"/>
+              </a:lnSpc>
+            </a:pPr>
+            <a:r>
+              <a:rPr sz="4000" b="1">
+                <a:solidFill>
+                  <a:srgbClr val="14B8A6"/>
+                </a:solidFill>
+                <a:latin typeface="PingFang SC"/>
+              </a:rPr>
+              <a:t>42.2%</a:t>
+            </a:r>
+          </a:p>
+        </p:txBody>
+      </p:sp>
+      <p:sp>
+        <p:nvSpPr>
+          <p:cNvPr id="13" name="TextBox 12"/>
+          <p:cNvSpPr txBox="1"/>
+          <p:nvPr/>
+        </p:nvSpPr>
+        <p:spPr>
+          <a:xfrm>
+            <a:off x="4508500" y="3333750"/>
+            <a:ext cx="3175000" cy="323850"/>
+          </a:xfrm>
+          <a:prstGeom prst="rect">
+            <a:avLst/>
+          </a:prstGeom>
+          <a:noFill/>
+        </p:spPr>
+        <p:txBody>
+          <a:bodyPr wrap="square" anchor="ctr">
+            <a:spAutoFit/>
+          </a:bodyPr>
+          <a:lstStyle/>
+          <a:p>
+            <a:pPr algn="ctr">
+              <a:lnSpc>
+                <a:spcPct val="100000"/>
+              </a:lnSpc>
+            </a:pPr>
+            <a:r>
+              <a:rPr sz="1300" b="0">
+                <a:solidFill>
+                  <a:srgbClr val="94A3B8"/>
+                </a:solidFill>
+                <a:latin typeface="PingFang SC"/>
+              </a:rPr>
+              <a:t>命中</a:t>
+            </a:r>
+          </a:p>
+        </p:txBody>
+      </p:sp>
+      <p:sp>
+        <p:nvSpPr>
+          <p:cNvPr id="14" name="TextBox 13"/>
+          <p:cNvSpPr txBox="1"/>
+          <p:nvPr/>
+        </p:nvSpPr>
+        <p:spPr>
+          <a:xfrm>
+            <a:off x="4660900" y="4057650"/>
+            <a:ext cx="2870200" cy="571500"/>
+          </a:xfrm>
+          <a:prstGeom prst="rect">
+            <a:avLst/>
+          </a:prstGeom>
+          <a:noFill/>
+        </p:spPr>
+        <p:txBody>
+          <a:bodyPr wrap="square" anchor="ctr">
+            <a:spAutoFit/>
+          </a:bodyPr>
+          <a:lstStyle/>
+          <a:p>
+            <a:pPr algn="ctr">
+              <a:lnSpc>
+                <a:spcPct val="100000"/>
+              </a:lnSpc>
+            </a:pPr>
+            <a:r>
+              <a:rPr sz="1300" b="1">
+                <a:solidFill>
+                  <a:srgbClr val="475569"/>
+                </a:solidFill>
+                <a:latin typeface="PingFang SC"/>
+              </a:rPr>
+              <a:t>实测</a:t>
+            </a:r>
+          </a:p>
+        </p:txBody>
+      </p:sp>
+      <p:sp>
+        <p:nvSpPr>
+          <p:cNvPr id="15" name="Rounded Rectangle 14"/>
+          <p:cNvSpPr/>
+          <p:nvPr/>
+        </p:nvSpPr>
+        <p:spPr>
+          <a:xfrm>
+            <a:off x="7969250" y="1905000"/>
+            <a:ext cx="3175000" cy="2857500"/>
+          </a:xfrm>
+          <a:prstGeom prst="roundRect">
+            <a:avLst>
+              <a:gd name="adj" fmla="val 8000"/>
+            </a:avLst>
+          </a:prstGeom>
+          <a:solidFill>
+            <a:srgbClr val="FFFFFF"/>
+          </a:solidFill>
+          <a:ln w="12700">
+            <a:solidFill>
+              <a:srgbClr val="DDE5EE"/>
+            </a:solidFill>
+          </a:ln>
+          <a:effectLst/>
+        </p:spPr>
+        <p:style>
+          <a:lnRef idx="1">
+            <a:schemeClr val="accent1"/>
+          </a:lnRef>
+          <a:fillRef idx="3">
+            <a:schemeClr val="accent1"/>
+          </a:fillRef>
+          <a:effectRef idx="2">
+            <a:schemeClr val="accent1"/>
+          </a:effectRef>
+          <a:fontRef idx="minor">
+            <a:schemeClr val="lt1"/>
+          </a:fontRef>
+        </p:style>
+        <p:txBody>
+          <a:bodyPr rtlCol="0" anchor="ctr"/>
+          <a:lstStyle/>
+          <a:p>
+            <a:pPr algn="ctr"/>
+          </a:p>
+        </p:txBody>
+      </p:sp>
+      <p:sp>
+        <p:nvSpPr>
+          <p:cNvPr id="16" name="Rectangle 15"/>
+          <p:cNvSpPr/>
+          <p:nvPr/>
+        </p:nvSpPr>
+        <p:spPr>
+          <a:xfrm>
+            <a:off x="7969250" y="1905000"/>
+            <a:ext cx="3175000" cy="76200"/>
+          </a:xfrm>
+          <a:prstGeom prst="rect">
+            <a:avLst/>
+          </a:prstGeom>
+          <a:solidFill>
+            <a:srgbClr val="8B5CF6"/>
+          </a:solidFill>
+          <a:ln>
+            <a:noFill/>
+          </a:ln>
+          <a:effectLst/>
+        </p:spPr>
+        <p:style>
+          <a:lnRef idx="1">
+            <a:schemeClr val="accent1"/>
+          </a:lnRef>
+          <a:fillRef idx="3">
+            <a:schemeClr val="accent1"/>
+          </a:fillRef>
+          <a:effectRef idx="2">
+            <a:schemeClr val="accent1"/>
+          </a:effectRef>
+          <a:fontRef idx="minor">
+            <a:schemeClr val="lt1"/>
+          </a:fontRef>
+        </p:style>
+        <p:txBody>
+          <a:bodyPr rtlCol="0" anchor="ctr"/>
+          <a:lstStyle/>
+          <a:p>
+            <a:pPr algn="ctr"/>
+          </a:p>
+        </p:txBody>
+      </p:sp>
+      <p:sp>
+        <p:nvSpPr>
+          <p:cNvPr id="17" name="TextBox 16"/>
+          <p:cNvSpPr txBox="1"/>
+          <p:nvPr/>
+        </p:nvSpPr>
+        <p:spPr>
+          <a:xfrm>
+            <a:off x="7969250" y="2286000"/>
+            <a:ext cx="3175000" cy="1047750"/>
+          </a:xfrm>
+          <a:prstGeom prst="rect">
+            <a:avLst/>
+          </a:prstGeom>
+          <a:noFill/>
+        </p:spPr>
+        <p:txBody>
+          <a:bodyPr wrap="square" anchor="ctr">
+            <a:spAutoFit/>
+          </a:bodyPr>
+          <a:lstStyle/>
+          <a:p>
+            <a:pPr algn="ctr">
+              <a:lnSpc>
+                <a:spcPct val="100000"/>
+              </a:lnSpc>
+            </a:pPr>
+            <a:r>
+              <a:rPr sz="4000" b="1">
+                <a:solidFill>
+                  <a:srgbClr val="8B5CF6"/>
+                </a:solidFill>
+                <a:latin typeface="PingFang SC"/>
+              </a:rPr>
+              <a:t>+32.3%</a:t>
+            </a:r>
+          </a:p>
+        </p:txBody>
+      </p:sp>
+      <p:sp>
+        <p:nvSpPr>
+          <p:cNvPr id="18" name="TextBox 17"/>
+          <p:cNvSpPr txBox="1"/>
+          <p:nvPr/>
+        </p:nvSpPr>
+        <p:spPr>
+          <a:xfrm>
+            <a:off x="7969250" y="3333750"/>
+            <a:ext cx="3175000" cy="323850"/>
+          </a:xfrm>
+          <a:prstGeom prst="rect">
+            <a:avLst/>
+          </a:prstGeom>
+          <a:noFill/>
+        </p:spPr>
+        <p:txBody>
+          <a:bodyPr wrap="square" anchor="ctr">
+            <a:spAutoFit/>
+          </a:bodyPr>
+          <a:lstStyle/>
+          <a:p>
+            <a:pPr algn="ctr">
+              <a:lnSpc>
+                <a:spcPct val="100000"/>
+              </a:lnSpc>
+            </a:pPr>
+            <a:r>
+              <a:rPr sz="1300" b="0">
+                <a:solidFill>
+                  <a:srgbClr val="94A3B8"/>
+                </a:solidFill>
+                <a:latin typeface="PingFang SC"/>
+              </a:rPr>
+              <a:t>提升</a:t>
+            </a:r>
+          </a:p>
+        </p:txBody>
+      </p:sp>
+      <p:sp>
+        <p:nvSpPr>
+          <p:cNvPr id="19" name="TextBox 18"/>
+          <p:cNvSpPr txBox="1"/>
+          <p:nvPr/>
+        </p:nvSpPr>
+        <p:spPr>
+          <a:xfrm>
+            <a:off x="8121650" y="4057650"/>
+            <a:ext cx="2870200" cy="571500"/>
+          </a:xfrm>
+          <a:prstGeom prst="rect">
+            <a:avLst/>
+          </a:prstGeom>
+          <a:noFill/>
+        </p:spPr>
+        <p:txBody>
+          <a:bodyPr wrap="square" anchor="ctr">
+            <a:spAutoFit/>
+          </a:bodyPr>
+          <a:lstStyle/>
+          <a:p>
+            <a:pPr algn="ctr">
+              <a:lnSpc>
+                <a:spcPct val="100000"/>
+              </a:lnSpc>
+            </a:pPr>
+            <a:r>
+              <a:rPr sz="1300" b="1">
+                <a:solidFill>
+                  <a:srgbClr val="475569"/>
+                </a:solidFill>
+                <a:latin typeface="PingFang SC"/>
+              </a:rPr>
+              <a:t>对比仅精确</a:t>
+            </a:r>
+          </a:p>
+        </p:txBody>
+      </p:sp>
+      <p:sp>
+        <p:nvSpPr>
+          <p:cNvPr id="20" name="TextBox 19"/>
+          <p:cNvSpPr txBox="1"/>
+          <p:nvPr/>
+        </p:nvSpPr>
+        <p:spPr>
+          <a:xfrm>
+            <a:off x="10287000" y="6534150"/>
+            <a:ext cx="1619250" cy="266700"/>
           </a:xfrm>
           <a:prstGeom prst="rect">
             <a:avLst/>
@@ -3923,672 +4550,6 @@
               </a:lnSpc>
             </a:pPr>
             <a:r>
-              <a:rPr sz="1100" b="0">
-                <a:solidFill>
-                  <a:srgbClr val="94A3B8"/>
-                </a:solidFill>
-                <a:latin typeface="PingFang SC"/>
-              </a:rPr>
-              <a:t>0.92^τ^相似阈值;42.2%^命中^实测;+32.3%^提升^对比仅精确|短查询(&lt;8字)强制 bypass</a:t>
-            </a:r>
-          </a:p>
-        </p:txBody>
-      </p:sp>
-      <p:sp>
-        <p:nvSpPr>
-          <p:cNvPr id="6" name="Rounded Rectangle 5"/>
-          <p:cNvSpPr/>
-          <p:nvPr/>
-        </p:nvSpPr>
-        <p:spPr>
-          <a:xfrm>
-            <a:off x="1047750" y="1905000"/>
-            <a:ext cx="3175000" cy="2857500"/>
-          </a:xfrm>
-          <a:prstGeom prst="roundRect">
-            <a:avLst>
-              <a:gd name="adj" fmla="val 8000"/>
-            </a:avLst>
-          </a:prstGeom>
-          <a:solidFill>
-            <a:srgbClr val="FFFFFF"/>
-          </a:solidFill>
-          <a:ln w="12700">
-            <a:solidFill>
-              <a:srgbClr val="DDE5EE"/>
-            </a:solidFill>
-          </a:ln>
-          <a:effectLst/>
-        </p:spPr>
-        <p:style>
-          <a:lnRef idx="1">
-            <a:schemeClr val="accent1"/>
-          </a:lnRef>
-          <a:fillRef idx="3">
-            <a:schemeClr val="accent1"/>
-          </a:fillRef>
-          <a:effectRef idx="2">
-            <a:schemeClr val="accent1"/>
-          </a:effectRef>
-          <a:fontRef idx="minor">
-            <a:schemeClr val="lt1"/>
-          </a:fontRef>
-        </p:style>
-        <p:txBody>
-          <a:bodyPr rtlCol="0" anchor="ctr"/>
-          <a:lstStyle/>
-          <a:p>
-            <a:pPr algn="ctr"/>
-          </a:p>
-        </p:txBody>
-      </p:sp>
-      <p:sp>
-        <p:nvSpPr>
-          <p:cNvPr id="7" name="Rectangle 6"/>
-          <p:cNvSpPr/>
-          <p:nvPr/>
-        </p:nvSpPr>
-        <p:spPr>
-          <a:xfrm>
-            <a:off x="1047750" y="1905000"/>
-            <a:ext cx="3175000" cy="76200"/>
-          </a:xfrm>
-          <a:prstGeom prst="rect">
-            <a:avLst/>
-          </a:prstGeom>
-          <a:solidFill>
-            <a:srgbClr val="2563EB"/>
-          </a:solidFill>
-          <a:ln>
-            <a:noFill/>
-          </a:ln>
-          <a:effectLst/>
-        </p:spPr>
-        <p:style>
-          <a:lnRef idx="1">
-            <a:schemeClr val="accent1"/>
-          </a:lnRef>
-          <a:fillRef idx="3">
-            <a:schemeClr val="accent1"/>
-          </a:fillRef>
-          <a:effectRef idx="2">
-            <a:schemeClr val="accent1"/>
-          </a:effectRef>
-          <a:fontRef idx="minor">
-            <a:schemeClr val="lt1"/>
-          </a:fontRef>
-        </p:style>
-        <p:txBody>
-          <a:bodyPr rtlCol="0" anchor="ctr"/>
-          <a:lstStyle/>
-          <a:p>
-            <a:pPr algn="ctr"/>
-          </a:p>
-        </p:txBody>
-      </p:sp>
-      <p:sp>
-        <p:nvSpPr>
-          <p:cNvPr id="8" name="TextBox 7"/>
-          <p:cNvSpPr txBox="1"/>
-          <p:nvPr/>
-        </p:nvSpPr>
-        <p:spPr>
-          <a:xfrm>
-            <a:off x="1047750" y="2286000"/>
-            <a:ext cx="3175000" cy="1047750"/>
-          </a:xfrm>
-          <a:prstGeom prst="rect">
-            <a:avLst/>
-          </a:prstGeom>
-          <a:noFill/>
-        </p:spPr>
-        <p:txBody>
-          <a:bodyPr wrap="square" anchor="ctr">
-            <a:spAutoFit/>
-          </a:bodyPr>
-          <a:lstStyle/>
-          <a:p>
-            <a:pPr algn="ctr">
-              <a:lnSpc>
-                <a:spcPct val="100000"/>
-              </a:lnSpc>
-            </a:pPr>
-            <a:r>
-              <a:rPr sz="4000" b="1">
-                <a:solidFill>
-                  <a:srgbClr val="2563EB"/>
-                </a:solidFill>
-                <a:latin typeface="PingFang SC"/>
-              </a:rPr>
-              <a:t>0.92</a:t>
-            </a:r>
-          </a:p>
-        </p:txBody>
-      </p:sp>
-      <p:sp>
-        <p:nvSpPr>
-          <p:cNvPr id="9" name="TextBox 8"/>
-          <p:cNvSpPr txBox="1"/>
-          <p:nvPr/>
-        </p:nvSpPr>
-        <p:spPr>
-          <a:xfrm>
-            <a:off x="1047750" y="3333750"/>
-            <a:ext cx="3175000" cy="323850"/>
-          </a:xfrm>
-          <a:prstGeom prst="rect">
-            <a:avLst/>
-          </a:prstGeom>
-          <a:noFill/>
-        </p:spPr>
-        <p:txBody>
-          <a:bodyPr wrap="square" anchor="ctr">
-            <a:spAutoFit/>
-          </a:bodyPr>
-          <a:lstStyle/>
-          <a:p>
-            <a:pPr algn="ctr">
-              <a:lnSpc>
-                <a:spcPct val="100000"/>
-              </a:lnSpc>
-            </a:pPr>
-            <a:r>
-              <a:rPr sz="1300" b="0">
-                <a:solidFill>
-                  <a:srgbClr val="94A3B8"/>
-                </a:solidFill>
-                <a:latin typeface="PingFang SC"/>
-              </a:rPr>
-              <a:t>τ</a:t>
-            </a:r>
-          </a:p>
-        </p:txBody>
-      </p:sp>
-      <p:sp>
-        <p:nvSpPr>
-          <p:cNvPr id="10" name="TextBox 9"/>
-          <p:cNvSpPr txBox="1"/>
-          <p:nvPr/>
-        </p:nvSpPr>
-        <p:spPr>
-          <a:xfrm>
-            <a:off x="1200150" y="4057650"/>
-            <a:ext cx="2870200" cy="571500"/>
-          </a:xfrm>
-          <a:prstGeom prst="rect">
-            <a:avLst/>
-          </a:prstGeom>
-          <a:noFill/>
-        </p:spPr>
-        <p:txBody>
-          <a:bodyPr wrap="square" anchor="ctr">
-            <a:spAutoFit/>
-          </a:bodyPr>
-          <a:lstStyle/>
-          <a:p>
-            <a:pPr algn="ctr">
-              <a:lnSpc>
-                <a:spcPct val="100000"/>
-              </a:lnSpc>
-            </a:pPr>
-            <a:r>
-              <a:rPr sz="1300" b="1">
-                <a:solidFill>
-                  <a:srgbClr val="475569"/>
-                </a:solidFill>
-                <a:latin typeface="PingFang SC"/>
-              </a:rPr>
-              <a:t>相似阈值</a:t>
-            </a:r>
-          </a:p>
-        </p:txBody>
-      </p:sp>
-      <p:sp>
-        <p:nvSpPr>
-          <p:cNvPr id="11" name="Rounded Rectangle 10"/>
-          <p:cNvSpPr/>
-          <p:nvPr/>
-        </p:nvSpPr>
-        <p:spPr>
-          <a:xfrm>
-            <a:off x="4508500" y="1905000"/>
-            <a:ext cx="3175000" cy="2857500"/>
-          </a:xfrm>
-          <a:prstGeom prst="roundRect">
-            <a:avLst>
-              <a:gd name="adj" fmla="val 8000"/>
-            </a:avLst>
-          </a:prstGeom>
-          <a:solidFill>
-            <a:srgbClr val="FFFFFF"/>
-          </a:solidFill>
-          <a:ln w="12700">
-            <a:solidFill>
-              <a:srgbClr val="DDE5EE"/>
-            </a:solidFill>
-          </a:ln>
-          <a:effectLst/>
-        </p:spPr>
-        <p:style>
-          <a:lnRef idx="1">
-            <a:schemeClr val="accent1"/>
-          </a:lnRef>
-          <a:fillRef idx="3">
-            <a:schemeClr val="accent1"/>
-          </a:fillRef>
-          <a:effectRef idx="2">
-            <a:schemeClr val="accent1"/>
-          </a:effectRef>
-          <a:fontRef idx="minor">
-            <a:schemeClr val="lt1"/>
-          </a:fontRef>
-        </p:style>
-        <p:txBody>
-          <a:bodyPr rtlCol="0" anchor="ctr"/>
-          <a:lstStyle/>
-          <a:p>
-            <a:pPr algn="ctr"/>
-          </a:p>
-        </p:txBody>
-      </p:sp>
-      <p:sp>
-        <p:nvSpPr>
-          <p:cNvPr id="12" name="Rectangle 11"/>
-          <p:cNvSpPr/>
-          <p:nvPr/>
-        </p:nvSpPr>
-        <p:spPr>
-          <a:xfrm>
-            <a:off x="4508500" y="1905000"/>
-            <a:ext cx="3175000" cy="76200"/>
-          </a:xfrm>
-          <a:prstGeom prst="rect">
-            <a:avLst/>
-          </a:prstGeom>
-          <a:solidFill>
-            <a:srgbClr val="14B8A6"/>
-          </a:solidFill>
-          <a:ln>
-            <a:noFill/>
-          </a:ln>
-          <a:effectLst/>
-        </p:spPr>
-        <p:style>
-          <a:lnRef idx="1">
-            <a:schemeClr val="accent1"/>
-          </a:lnRef>
-          <a:fillRef idx="3">
-            <a:schemeClr val="accent1"/>
-          </a:fillRef>
-          <a:effectRef idx="2">
-            <a:schemeClr val="accent1"/>
-          </a:effectRef>
-          <a:fontRef idx="minor">
-            <a:schemeClr val="lt1"/>
-          </a:fontRef>
-        </p:style>
-        <p:txBody>
-          <a:bodyPr rtlCol="0" anchor="ctr"/>
-          <a:lstStyle/>
-          <a:p>
-            <a:pPr algn="ctr"/>
-          </a:p>
-        </p:txBody>
-      </p:sp>
-      <p:sp>
-        <p:nvSpPr>
-          <p:cNvPr id="13" name="TextBox 12"/>
-          <p:cNvSpPr txBox="1"/>
-          <p:nvPr/>
-        </p:nvSpPr>
-        <p:spPr>
-          <a:xfrm>
-            <a:off x="4508500" y="2286000"/>
-            <a:ext cx="3175000" cy="1047750"/>
-          </a:xfrm>
-          <a:prstGeom prst="rect">
-            <a:avLst/>
-          </a:prstGeom>
-          <a:noFill/>
-        </p:spPr>
-        <p:txBody>
-          <a:bodyPr wrap="square" anchor="ctr">
-            <a:spAutoFit/>
-          </a:bodyPr>
-          <a:lstStyle/>
-          <a:p>
-            <a:pPr algn="ctr">
-              <a:lnSpc>
-                <a:spcPct val="100000"/>
-              </a:lnSpc>
-            </a:pPr>
-            <a:r>
-              <a:rPr sz="4000" b="1">
-                <a:solidFill>
-                  <a:srgbClr val="14B8A6"/>
-                </a:solidFill>
-                <a:latin typeface="PingFang SC"/>
-              </a:rPr>
-              <a:t>42.2%</a:t>
-            </a:r>
-          </a:p>
-        </p:txBody>
-      </p:sp>
-      <p:sp>
-        <p:nvSpPr>
-          <p:cNvPr id="14" name="TextBox 13"/>
-          <p:cNvSpPr txBox="1"/>
-          <p:nvPr/>
-        </p:nvSpPr>
-        <p:spPr>
-          <a:xfrm>
-            <a:off x="4508500" y="3333750"/>
-            <a:ext cx="3175000" cy="323850"/>
-          </a:xfrm>
-          <a:prstGeom prst="rect">
-            <a:avLst/>
-          </a:prstGeom>
-          <a:noFill/>
-        </p:spPr>
-        <p:txBody>
-          <a:bodyPr wrap="square" anchor="ctr">
-            <a:spAutoFit/>
-          </a:bodyPr>
-          <a:lstStyle/>
-          <a:p>
-            <a:pPr algn="ctr">
-              <a:lnSpc>
-                <a:spcPct val="100000"/>
-              </a:lnSpc>
-            </a:pPr>
-            <a:r>
-              <a:rPr sz="1300" b="0">
-                <a:solidFill>
-                  <a:srgbClr val="94A3B8"/>
-                </a:solidFill>
-                <a:latin typeface="PingFang SC"/>
-              </a:rPr>
-              <a:t>命中</a:t>
-            </a:r>
-          </a:p>
-        </p:txBody>
-      </p:sp>
-      <p:sp>
-        <p:nvSpPr>
-          <p:cNvPr id="15" name="TextBox 14"/>
-          <p:cNvSpPr txBox="1"/>
-          <p:nvPr/>
-        </p:nvSpPr>
-        <p:spPr>
-          <a:xfrm>
-            <a:off x="4660900" y="4057650"/>
-            <a:ext cx="2870200" cy="571500"/>
-          </a:xfrm>
-          <a:prstGeom prst="rect">
-            <a:avLst/>
-          </a:prstGeom>
-          <a:noFill/>
-        </p:spPr>
-        <p:txBody>
-          <a:bodyPr wrap="square" anchor="ctr">
-            <a:spAutoFit/>
-          </a:bodyPr>
-          <a:lstStyle/>
-          <a:p>
-            <a:pPr algn="ctr">
-              <a:lnSpc>
-                <a:spcPct val="100000"/>
-              </a:lnSpc>
-            </a:pPr>
-            <a:r>
-              <a:rPr sz="1300" b="1">
-                <a:solidFill>
-                  <a:srgbClr val="475569"/>
-                </a:solidFill>
-                <a:latin typeface="PingFang SC"/>
-              </a:rPr>
-              <a:t>实测</a:t>
-            </a:r>
-          </a:p>
-        </p:txBody>
-      </p:sp>
-      <p:sp>
-        <p:nvSpPr>
-          <p:cNvPr id="16" name="Rounded Rectangle 15"/>
-          <p:cNvSpPr/>
-          <p:nvPr/>
-        </p:nvSpPr>
-        <p:spPr>
-          <a:xfrm>
-            <a:off x="7969250" y="1905000"/>
-            <a:ext cx="3175000" cy="2857500"/>
-          </a:xfrm>
-          <a:prstGeom prst="roundRect">
-            <a:avLst>
-              <a:gd name="adj" fmla="val 8000"/>
-            </a:avLst>
-          </a:prstGeom>
-          <a:solidFill>
-            <a:srgbClr val="FFFFFF"/>
-          </a:solidFill>
-          <a:ln w="12700">
-            <a:solidFill>
-              <a:srgbClr val="DDE5EE"/>
-            </a:solidFill>
-          </a:ln>
-          <a:effectLst/>
-        </p:spPr>
-        <p:style>
-          <a:lnRef idx="1">
-            <a:schemeClr val="accent1"/>
-          </a:lnRef>
-          <a:fillRef idx="3">
-            <a:schemeClr val="accent1"/>
-          </a:fillRef>
-          <a:effectRef idx="2">
-            <a:schemeClr val="accent1"/>
-          </a:effectRef>
-          <a:fontRef idx="minor">
-            <a:schemeClr val="lt1"/>
-          </a:fontRef>
-        </p:style>
-        <p:txBody>
-          <a:bodyPr rtlCol="0" anchor="ctr"/>
-          <a:lstStyle/>
-          <a:p>
-            <a:pPr algn="ctr"/>
-          </a:p>
-        </p:txBody>
-      </p:sp>
-      <p:sp>
-        <p:nvSpPr>
-          <p:cNvPr id="17" name="Rectangle 16"/>
-          <p:cNvSpPr/>
-          <p:nvPr/>
-        </p:nvSpPr>
-        <p:spPr>
-          <a:xfrm>
-            <a:off x="7969250" y="1905000"/>
-            <a:ext cx="3175000" cy="76200"/>
-          </a:xfrm>
-          <a:prstGeom prst="rect">
-            <a:avLst/>
-          </a:prstGeom>
-          <a:solidFill>
-            <a:srgbClr val="8B5CF6"/>
-          </a:solidFill>
-          <a:ln>
-            <a:noFill/>
-          </a:ln>
-          <a:effectLst/>
-        </p:spPr>
-        <p:style>
-          <a:lnRef idx="1">
-            <a:schemeClr val="accent1"/>
-          </a:lnRef>
-          <a:fillRef idx="3">
-            <a:schemeClr val="accent1"/>
-          </a:fillRef>
-          <a:effectRef idx="2">
-            <a:schemeClr val="accent1"/>
-          </a:effectRef>
-          <a:fontRef idx="minor">
-            <a:schemeClr val="lt1"/>
-          </a:fontRef>
-        </p:style>
-        <p:txBody>
-          <a:bodyPr rtlCol="0" anchor="ctr"/>
-          <a:lstStyle/>
-          <a:p>
-            <a:pPr algn="ctr"/>
-          </a:p>
-        </p:txBody>
-      </p:sp>
-      <p:sp>
-        <p:nvSpPr>
-          <p:cNvPr id="18" name="TextBox 17"/>
-          <p:cNvSpPr txBox="1"/>
-          <p:nvPr/>
-        </p:nvSpPr>
-        <p:spPr>
-          <a:xfrm>
-            <a:off x="7969250" y="2286000"/>
-            <a:ext cx="3175000" cy="1047750"/>
-          </a:xfrm>
-          <a:prstGeom prst="rect">
-            <a:avLst/>
-          </a:prstGeom>
-          <a:noFill/>
-        </p:spPr>
-        <p:txBody>
-          <a:bodyPr wrap="square" anchor="ctr">
-            <a:spAutoFit/>
-          </a:bodyPr>
-          <a:lstStyle/>
-          <a:p>
-            <a:pPr algn="ctr">
-              <a:lnSpc>
-                <a:spcPct val="100000"/>
-              </a:lnSpc>
-            </a:pPr>
-            <a:r>
-              <a:rPr sz="4000" b="1">
-                <a:solidFill>
-                  <a:srgbClr val="8B5CF6"/>
-                </a:solidFill>
-                <a:latin typeface="PingFang SC"/>
-              </a:rPr>
-              <a:t>+32.3%</a:t>
-            </a:r>
-          </a:p>
-        </p:txBody>
-      </p:sp>
-      <p:sp>
-        <p:nvSpPr>
-          <p:cNvPr id="19" name="TextBox 18"/>
-          <p:cNvSpPr txBox="1"/>
-          <p:nvPr/>
-        </p:nvSpPr>
-        <p:spPr>
-          <a:xfrm>
-            <a:off x="7969250" y="3333750"/>
-            <a:ext cx="3175000" cy="323850"/>
-          </a:xfrm>
-          <a:prstGeom prst="rect">
-            <a:avLst/>
-          </a:prstGeom>
-          <a:noFill/>
-        </p:spPr>
-        <p:txBody>
-          <a:bodyPr wrap="square" anchor="ctr">
-            <a:spAutoFit/>
-          </a:bodyPr>
-          <a:lstStyle/>
-          <a:p>
-            <a:pPr algn="ctr">
-              <a:lnSpc>
-                <a:spcPct val="100000"/>
-              </a:lnSpc>
-            </a:pPr>
-            <a:r>
-              <a:rPr sz="1300" b="0">
-                <a:solidFill>
-                  <a:srgbClr val="94A3B8"/>
-                </a:solidFill>
-                <a:latin typeface="PingFang SC"/>
-              </a:rPr>
-              <a:t>提升</a:t>
-            </a:r>
-          </a:p>
-        </p:txBody>
-      </p:sp>
-      <p:sp>
-        <p:nvSpPr>
-          <p:cNvPr id="20" name="TextBox 19"/>
-          <p:cNvSpPr txBox="1"/>
-          <p:nvPr/>
-        </p:nvSpPr>
-        <p:spPr>
-          <a:xfrm>
-            <a:off x="8121650" y="4057650"/>
-            <a:ext cx="2870200" cy="571500"/>
-          </a:xfrm>
-          <a:prstGeom prst="rect">
-            <a:avLst/>
-          </a:prstGeom>
-          <a:noFill/>
-        </p:spPr>
-        <p:txBody>
-          <a:bodyPr wrap="square" anchor="ctr">
-            <a:spAutoFit/>
-          </a:bodyPr>
-          <a:lstStyle/>
-          <a:p>
-            <a:pPr algn="ctr">
-              <a:lnSpc>
-                <a:spcPct val="100000"/>
-              </a:lnSpc>
-            </a:pPr>
-            <a:r>
-              <a:rPr sz="1300" b="1">
-                <a:solidFill>
-                  <a:srgbClr val="475569"/>
-                </a:solidFill>
-                <a:latin typeface="PingFang SC"/>
-              </a:rPr>
-              <a:t>对比仅精确|短查询(&lt;8字)强制 bypass</a:t>
-            </a:r>
-          </a:p>
-        </p:txBody>
-      </p:sp>
-      <p:sp>
-        <p:nvSpPr>
-          <p:cNvPr id="21" name="TextBox 20"/>
-          <p:cNvSpPr txBox="1"/>
-          <p:nvPr/>
-        </p:nvSpPr>
-        <p:spPr>
-          <a:xfrm>
-            <a:off x="10287000" y="6534150"/>
-            <a:ext cx="1619250" cy="266700"/>
-          </a:xfrm>
-          <a:prstGeom prst="rect">
-            <a:avLst/>
-          </a:prstGeom>
-          <a:noFill/>
-        </p:spPr>
-        <p:txBody>
-          <a:bodyPr wrap="square" anchor="ctr">
-            <a:spAutoFit/>
-          </a:bodyPr>
-          <a:lstStyle/>
-          <a:p>
-            <a:pPr algn="r">
-              <a:lnSpc>
-                <a:spcPct val="100000"/>
-              </a:lnSpc>
-            </a:pPr>
-            <a:r>
               <a:rPr sz="900" b="0">
                 <a:solidFill>
                   <a:srgbClr val="94A3B8"/>
@@ -4602,7 +4563,7 @@
       </p:sp>
       <p:sp>
         <p:nvSpPr>
-          <p:cNvPr id="22" name="TextBox 21"/>
+          <p:cNvPr id="21" name="TextBox 20"/>
           <p:cNvSpPr txBox="1"/>
           <p:nvPr/>
         </p:nvSpPr>
@@ -11672,8 +11633,8 @@
         </p:nvSpPr>
         <p:spPr>
           <a:xfrm>
-            <a:off x="2524125" y="1905000"/>
-            <a:ext cx="2228850" cy="1047750"/>
+            <a:off x="1698625" y="2000250"/>
+            <a:ext cx="2190750" cy="552450"/>
           </a:xfrm>
           <a:prstGeom prst="roundRect">
             <a:avLst>
@@ -11720,8 +11681,8 @@
         </p:nvSpPr>
         <p:spPr>
           <a:xfrm>
-            <a:off x="2524125" y="1905000"/>
-            <a:ext cx="2228850" cy="1047750"/>
+            <a:off x="1698625" y="2000250"/>
+            <a:ext cx="2190750" cy="552450"/>
           </a:xfrm>
           <a:prstGeom prst="rect">
             <a:avLst/>
@@ -11742,7 +11703,7 @@
             <a:r>
               <a:rPr sz="1300" b="1">
                 <a:solidFill>
-                  <a:srgbClr val="475569"/>
+                  <a:srgbClr val="0B1D3A"/>
                 </a:solidFill>
                 <a:latin typeface="PingFang SC"/>
               </a:rPr>
@@ -11759,8 +11720,8 @@
         </p:nvSpPr>
         <p:spPr>
           <a:xfrm>
-            <a:off x="4905375" y="1905000"/>
-            <a:ext cx="2228850" cy="1047750"/>
+            <a:off x="5000625" y="2000250"/>
+            <a:ext cx="2190750" cy="552450"/>
           </a:xfrm>
           <a:prstGeom prst="roundRect">
             <a:avLst>
@@ -11807,8 +11768,8 @@
         </p:nvSpPr>
         <p:spPr>
           <a:xfrm>
-            <a:off x="4905375" y="1905000"/>
-            <a:ext cx="2228850" cy="1047750"/>
+            <a:off x="5000625" y="2000250"/>
+            <a:ext cx="2190750" cy="552450"/>
           </a:xfrm>
           <a:prstGeom prst="rect">
             <a:avLst/>
@@ -11829,7 +11790,7 @@
             <a:r>
               <a:rPr sz="1300" b="1">
                 <a:solidFill>
-                  <a:srgbClr val="475569"/>
+                  <a:srgbClr val="0B1D3A"/>
                 </a:solidFill>
                 <a:latin typeface="PingFang SC"/>
               </a:rPr>
@@ -11846,8 +11807,8 @@
         </p:nvSpPr>
         <p:spPr>
           <a:xfrm>
-            <a:off x="7286625" y="1905000"/>
-            <a:ext cx="2228850" cy="1047750"/>
+            <a:off x="8302625" y="2000250"/>
+            <a:ext cx="2190750" cy="552450"/>
           </a:xfrm>
           <a:prstGeom prst="roundRect">
             <a:avLst>
@@ -11894,8 +11855,8 @@
         </p:nvSpPr>
         <p:spPr>
           <a:xfrm>
-            <a:off x="7286625" y="1905000"/>
-            <a:ext cx="2228850" cy="1047750"/>
+            <a:off x="8302625" y="2000250"/>
+            <a:ext cx="2190750" cy="552450"/>
           </a:xfrm>
           <a:prstGeom prst="rect">
             <a:avLst/>
@@ -11916,7 +11877,7 @@
             <a:r>
               <a:rPr sz="1300" b="1">
                 <a:solidFill>
-                  <a:srgbClr val="475569"/>
+                  <a:srgbClr val="0B1D3A"/>
                 </a:solidFill>
                 <a:latin typeface="PingFang SC"/>
               </a:rPr>
@@ -11933,8 +11894,8 @@
         </p:nvSpPr>
         <p:spPr>
           <a:xfrm>
-            <a:off x="2524125" y="3524250"/>
-            <a:ext cx="2228850" cy="1047750"/>
+            <a:off x="1698625" y="3429000"/>
+            <a:ext cx="2190750" cy="552450"/>
           </a:xfrm>
           <a:prstGeom prst="roundRect">
             <a:avLst>
@@ -11981,8 +11942,8 @@
         </p:nvSpPr>
         <p:spPr>
           <a:xfrm>
-            <a:off x="2524125" y="3524250"/>
-            <a:ext cx="2228850" cy="1047750"/>
+            <a:off x="1698625" y="3429000"/>
+            <a:ext cx="2190750" cy="552450"/>
           </a:xfrm>
           <a:prstGeom prst="rect">
             <a:avLst/>
@@ -12003,7 +11964,7 @@
             <a:r>
               <a:rPr sz="1300" b="1">
                 <a:solidFill>
-                  <a:srgbClr val="475569"/>
+                  <a:srgbClr val="0B1D3A"/>
                 </a:solidFill>
                 <a:latin typeface="PingFang SC"/>
               </a:rPr>
@@ -12020,8 +11981,8 @@
         </p:nvSpPr>
         <p:spPr>
           <a:xfrm>
-            <a:off x="4905375" y="3524250"/>
-            <a:ext cx="2228850" cy="1047750"/>
+            <a:off x="5000625" y="3429000"/>
+            <a:ext cx="2190750" cy="552450"/>
           </a:xfrm>
           <a:prstGeom prst="roundRect">
             <a:avLst>
@@ -12068,8 +12029,8 @@
         </p:nvSpPr>
         <p:spPr>
           <a:xfrm>
-            <a:off x="4905375" y="3524250"/>
-            <a:ext cx="2228850" cy="1047750"/>
+            <a:off x="5000625" y="3429000"/>
+            <a:ext cx="2190750" cy="552450"/>
           </a:xfrm>
           <a:prstGeom prst="rect">
             <a:avLst/>
@@ -12090,7 +12051,7 @@
             <a:r>
               <a:rPr sz="1300" b="1">
                 <a:solidFill>
-                  <a:srgbClr val="475569"/>
+                  <a:srgbClr val="0B1D3A"/>
                 </a:solidFill>
                 <a:latin typeface="PingFang SC"/>
               </a:rPr>
@@ -12107,15 +12068,15 @@
         </p:nvCxnSpPr>
         <p:spPr>
           <a:xfrm>
-            <a:off x="4752975" y="2428875"/>
-            <a:ext cx="152400" cy="0"/>
+            <a:off x="3889375" y="2276475"/>
+            <a:ext cx="1044575" cy="0"/>
           </a:xfrm>
           <a:prstGeom prst="line">
             <a:avLst/>
           </a:prstGeom>
-          <a:ln w="17780">
+          <a:ln w="19050">
             <a:solidFill>
-              <a:srgbClr val="475569"/>
+              <a:srgbClr val="2563EB"/>
             </a:solidFill>
           </a:ln>
         </p:spPr>
@@ -12142,14 +12103,14 @@
         </p:nvSpPr>
         <p:spPr>
           <a:xfrm rot="5400000">
-            <a:off x="4819651" y="2386013"/>
+            <a:off x="4848226" y="2233613"/>
             <a:ext cx="85725" cy="85725"/>
           </a:xfrm>
           <a:prstGeom prst="triangle">
             <a:avLst/>
           </a:prstGeom>
           <a:solidFill>
-            <a:srgbClr val="475569"/>
+            <a:srgbClr val="2563EB"/>
           </a:solidFill>
           <a:ln>
             <a:noFill/>
@@ -12180,14 +12141,62 @@
       </p:sp>
       <p:sp>
         <p:nvSpPr>
-          <p:cNvPr id="17" name="TextBox 16"/>
+          <p:cNvPr id="17" name="Rounded Rectangle 16"/>
+          <p:cNvSpPr/>
+          <p:nvPr/>
+        </p:nvSpPr>
+        <p:spPr>
+          <a:xfrm>
+            <a:off x="3640137" y="2133600"/>
+            <a:ext cx="1543050" cy="285750"/>
+          </a:xfrm>
+          <a:prstGeom prst="roundRect">
+            <a:avLst>
+              <a:gd name="adj" fmla="val 8000"/>
+            </a:avLst>
+          </a:prstGeom>
+          <a:solidFill>
+            <a:srgbClr val="FFFFFF"/>
+          </a:solidFill>
+          <a:ln w="12700">
+            <a:solidFill>
+              <a:srgbClr val="DDE5EE"/>
+            </a:solidFill>
+          </a:ln>
+          <a:effectLst/>
+        </p:spPr>
+        <p:style>
+          <a:lnRef idx="1">
+            <a:schemeClr val="accent1"/>
+          </a:lnRef>
+          <a:fillRef idx="3">
+            <a:schemeClr val="accent1"/>
+          </a:fillRef>
+          <a:effectRef idx="2">
+            <a:schemeClr val="accent1"/>
+          </a:effectRef>
+          <a:fontRef idx="minor">
+            <a:schemeClr val="lt1"/>
+          </a:fontRef>
+        </p:style>
+        <p:txBody>
+          <a:bodyPr rtlCol="0" anchor="ctr"/>
+          <a:lstStyle/>
+          <a:p>
+            <a:pPr algn="ctr"/>
+          </a:p>
+        </p:txBody>
+      </p:sp>
+      <p:sp>
+        <p:nvSpPr>
+          <p:cNvPr id="18" name="TextBox 17"/>
           <p:cNvSpPr txBox="1"/>
           <p:nvPr/>
         </p:nvSpPr>
         <p:spPr>
           <a:xfrm>
-            <a:off x="3971925" y="2105025"/>
-            <a:ext cx="1714500" cy="228600"/>
+            <a:off x="3640137" y="2133600"/>
+            <a:ext cx="1543050" cy="285750"/>
           </a:xfrm>
           <a:prstGeom prst="rect">
             <a:avLst/>
@@ -12206,34 +12215,34 @@
               </a:lnSpc>
             </a:pPr>
             <a:r>
-              <a:rPr sz="900" b="0">
-                <a:solidFill>
-                  <a:srgbClr val="94A3B8"/>
+              <a:rPr sz="1100" b="1">
+                <a:solidFill>
+                  <a:srgbClr val="0B1D3A"/>
                 </a:solidFill>
                 <a:latin typeface="PingFang SC"/>
               </a:rPr>
-              <a:t>主模型 429/5xx</a:t>
+              <a:t>主模型 42</a:t>
             </a:r>
           </a:p>
         </p:txBody>
       </p:sp>
       <p:cxnSp>
         <p:nvCxnSpPr>
-          <p:cNvPr id="18" name="Connector 17"/>
+          <p:cNvPr id="19" name="Connector 18"/>
           <p:cNvCxnSpPr/>
           <p:nvPr/>
         </p:nvCxnSpPr>
         <p:spPr>
           <a:xfrm>
-            <a:off x="7134225" y="2428875"/>
-            <a:ext cx="152400" cy="0"/>
+            <a:off x="7191375" y="2276475"/>
+            <a:ext cx="1044575" cy="0"/>
           </a:xfrm>
           <a:prstGeom prst="line">
             <a:avLst/>
           </a:prstGeom>
-          <a:ln w="17780">
+          <a:ln w="19050">
             <a:solidFill>
-              <a:srgbClr val="475569"/>
+              <a:srgbClr val="2563EB"/>
             </a:solidFill>
           </a:ln>
         </p:spPr>
@@ -12254,20 +12263,20 @@
       </p:cxnSp>
       <p:sp>
         <p:nvSpPr>
-          <p:cNvPr id="19" name="Isosceles Triangle 18"/>
+          <p:cNvPr id="20" name="Isosceles Triangle 19"/>
           <p:cNvSpPr/>
           <p:nvPr/>
         </p:nvSpPr>
         <p:spPr>
           <a:xfrm rot="5400000">
-            <a:off x="7200901" y="2386013"/>
+            <a:off x="8150226" y="2233613"/>
             <a:ext cx="85725" cy="85725"/>
           </a:xfrm>
           <a:prstGeom prst="triangle">
             <a:avLst/>
           </a:prstGeom>
           <a:solidFill>
-            <a:srgbClr val="475569"/>
+            <a:srgbClr val="2563EB"/>
           </a:solidFill>
           <a:ln>
             <a:noFill/>
@@ -12298,14 +12307,62 @@
       </p:sp>
       <p:sp>
         <p:nvSpPr>
-          <p:cNvPr id="20" name="TextBox 19"/>
+          <p:cNvPr id="21" name="Rounded Rectangle 20"/>
+          <p:cNvSpPr/>
+          <p:nvPr/>
+        </p:nvSpPr>
+        <p:spPr>
+          <a:xfrm>
+            <a:off x="6942137" y="2133600"/>
+            <a:ext cx="1543050" cy="285750"/>
+          </a:xfrm>
+          <a:prstGeom prst="roundRect">
+            <a:avLst>
+              <a:gd name="adj" fmla="val 8000"/>
+            </a:avLst>
+          </a:prstGeom>
+          <a:solidFill>
+            <a:srgbClr val="FFFFFF"/>
+          </a:solidFill>
+          <a:ln w="12700">
+            <a:solidFill>
+              <a:srgbClr val="DDE5EE"/>
+            </a:solidFill>
+          </a:ln>
+          <a:effectLst/>
+        </p:spPr>
+        <p:style>
+          <a:lnRef idx="1">
+            <a:schemeClr val="accent1"/>
+          </a:lnRef>
+          <a:fillRef idx="3">
+            <a:schemeClr val="accent1"/>
+          </a:fillRef>
+          <a:effectRef idx="2">
+            <a:schemeClr val="accent1"/>
+          </a:effectRef>
+          <a:fontRef idx="minor">
+            <a:schemeClr val="lt1"/>
+          </a:fontRef>
+        </p:style>
+        <p:txBody>
+          <a:bodyPr rtlCol="0" anchor="ctr"/>
+          <a:lstStyle/>
+          <a:p>
+            <a:pPr algn="ctr"/>
+          </a:p>
+        </p:txBody>
+      </p:sp>
+      <p:sp>
+        <p:nvSpPr>
+          <p:cNvPr id="22" name="TextBox 21"/>
           <p:cNvSpPr txBox="1"/>
           <p:nvPr/>
         </p:nvSpPr>
         <p:spPr>
           <a:xfrm>
-            <a:off x="6353175" y="2105025"/>
-            <a:ext cx="1714500" cy="228600"/>
+            <a:off x="6942137" y="2133600"/>
+            <a:ext cx="1543050" cy="285750"/>
           </a:xfrm>
           <a:prstGeom prst="rect">
             <a:avLst/>
@@ -12324,36 +12381,75 @@
               </a:lnSpc>
             </a:pPr>
             <a:r>
-              <a:rPr sz="900" b="0">
-                <a:solidFill>
-                  <a:srgbClr val="94A3B8"/>
+              <a:rPr sz="1100" b="1">
+                <a:solidFill>
+                  <a:srgbClr val="0B1D3A"/>
                 </a:solidFill>
                 <a:latin typeface="PingFang SC"/>
               </a:rPr>
-              <a:t>fast 也失败</a:t>
+              <a:t>fast 也</a:t>
             </a:r>
           </a:p>
         </p:txBody>
       </p:sp>
       <p:cxnSp>
         <p:nvCxnSpPr>
-          <p:cNvPr id="21" name="Connector 20"/>
+          <p:cNvPr id="23" name="Connector 22"/>
           <p:cNvCxnSpPr/>
           <p:nvPr/>
         </p:nvCxnSpPr>
         <p:spPr>
+          <a:xfrm flipV="1">
+            <a:off x="9398000" y="1562100"/>
+            <a:ext cx="0" cy="419100"/>
+          </a:xfrm>
+          <a:prstGeom prst="line">
+            <a:avLst/>
+          </a:prstGeom>
+          <a:ln w="12700">
+            <a:solidFill>
+              <a:srgbClr val="DDE5EE"/>
+            </a:solidFill>
+            <a:prstDash val="dash"/>
+          </a:ln>
+          <a:effectLst/>
+        </p:spPr>
+        <p:style>
+          <a:lnRef idx="2">
+            <a:schemeClr val="accent1"/>
+          </a:lnRef>
+          <a:fillRef idx="0">
+            <a:schemeClr val="accent1"/>
+          </a:fillRef>
+          <a:effectRef idx="1">
+            <a:schemeClr val="accent1"/>
+          </a:effectRef>
+          <a:fontRef idx="minor">
+            <a:schemeClr val="tx1"/>
+          </a:fontRef>
+        </p:style>
+      </p:cxnSp>
+      <p:cxnSp>
+        <p:nvCxnSpPr>
+          <p:cNvPr id="24" name="Connector 23"/>
+          <p:cNvCxnSpPr/>
+          <p:nvPr/>
+        </p:nvCxnSpPr>
+        <p:spPr>
           <a:xfrm flipH="1">
-            <a:off x="4752975" y="2428875"/>
-            <a:ext cx="3648075" cy="1619250"/>
+            <a:off x="2794000" y="1562100"/>
+            <a:ext cx="6604000" cy="0"/>
           </a:xfrm>
           <a:prstGeom prst="line">
             <a:avLst/>
           </a:prstGeom>
-          <a:ln w="17780">
+          <a:ln w="12700">
             <a:solidFill>
-              <a:srgbClr val="475569"/>
+              <a:srgbClr val="DDE5EE"/>
             </a:solidFill>
-          </a:ln>
+            <a:prstDash val="dash"/>
+          </a:ln>
+          <a:effectLst/>
         </p:spPr>
         <p:style>
           <a:lnRef idx="2">
@@ -12370,22 +12466,94 @@
           </a:fontRef>
         </p:style>
       </p:cxnSp>
-      <p:sp>
-        <p:nvSpPr>
-          <p:cNvPr id="22" name="Isosceles Triangle 21"/>
-          <p:cNvSpPr/>
-          <p:nvPr/>
-        </p:nvSpPr>
-        <p:spPr>
-          <a:xfrm rot="14763917">
-            <a:off x="4749289" y="3987874"/>
+      <p:cxnSp>
+        <p:nvCxnSpPr>
+          <p:cNvPr id="25" name="Connector 24"/>
+          <p:cNvCxnSpPr/>
+          <p:nvPr/>
+        </p:nvCxnSpPr>
+        <p:spPr>
+          <a:xfrm>
+            <a:off x="2794000" y="1562100"/>
+            <a:ext cx="0" cy="1781175"/>
+          </a:xfrm>
+          <a:prstGeom prst="line">
+            <a:avLst/>
+          </a:prstGeom>
+          <a:ln w="12700">
+            <a:solidFill>
+              <a:srgbClr val="DDE5EE"/>
+            </a:solidFill>
+            <a:prstDash val="dash"/>
+          </a:ln>
+          <a:effectLst/>
+        </p:spPr>
+        <p:style>
+          <a:lnRef idx="2">
+            <a:schemeClr val="accent1"/>
+          </a:lnRef>
+          <a:fillRef idx="0">
+            <a:schemeClr val="accent1"/>
+          </a:fillRef>
+          <a:effectRef idx="1">
+            <a:schemeClr val="accent1"/>
+          </a:effectRef>
+          <a:fontRef idx="minor">
+            <a:schemeClr val="tx1"/>
+          </a:fontRef>
+        </p:style>
+      </p:cxnSp>
+      <p:cxnSp>
+        <p:nvCxnSpPr>
+          <p:cNvPr id="26" name="Connector 25"/>
+          <p:cNvCxnSpPr/>
+          <p:nvPr/>
+        </p:nvCxnSpPr>
+        <p:spPr>
+          <a:xfrm>
+            <a:off x="3889375" y="3705225"/>
+            <a:ext cx="1044575" cy="0"/>
+          </a:xfrm>
+          <a:prstGeom prst="line">
+            <a:avLst/>
+          </a:prstGeom>
+          <a:ln w="19050">
+            <a:solidFill>
+              <a:srgbClr val="2563EB"/>
+            </a:solidFill>
+          </a:ln>
+        </p:spPr>
+        <p:style>
+          <a:lnRef idx="2">
+            <a:schemeClr val="accent1"/>
+          </a:lnRef>
+          <a:fillRef idx="0">
+            <a:schemeClr val="accent1"/>
+          </a:fillRef>
+          <a:effectRef idx="1">
+            <a:schemeClr val="accent1"/>
+          </a:effectRef>
+          <a:fontRef idx="minor">
+            <a:schemeClr val="tx1"/>
+          </a:fontRef>
+        </p:style>
+      </p:cxnSp>
+      <p:sp>
+        <p:nvSpPr>
+          <p:cNvPr id="27" name="Isosceles Triangle 26"/>
+          <p:cNvSpPr/>
+          <p:nvPr/>
+        </p:nvSpPr>
+        <p:spPr>
+          <a:xfrm rot="5400000">
+            <a:off x="4848226" y="3662363"/>
             <a:ext cx="85725" cy="85725"/>
           </a:xfrm>
           <a:prstGeom prst="triangle">
             <a:avLst/>
           </a:prstGeom>
           <a:solidFill>
-            <a:srgbClr val="475569"/>
+            <a:srgbClr val="2563EB"/>
           </a:solidFill>
           <a:ln>
             <a:noFill/>
@@ -12416,14 +12584,62 @@
       </p:sp>
       <p:sp>
         <p:nvSpPr>
-          <p:cNvPr id="23" name="TextBox 22"/>
+          <p:cNvPr id="28" name="Rounded Rectangle 27"/>
+          <p:cNvSpPr/>
+          <p:nvPr/>
+        </p:nvSpPr>
+        <p:spPr>
+          <a:xfrm>
+            <a:off x="3640137" y="3562350"/>
+            <a:ext cx="1543050" cy="285750"/>
+          </a:xfrm>
+          <a:prstGeom prst="roundRect">
+            <a:avLst>
+              <a:gd name="adj" fmla="val 8000"/>
+            </a:avLst>
+          </a:prstGeom>
+          <a:solidFill>
+            <a:srgbClr val="FFFFFF"/>
+          </a:solidFill>
+          <a:ln w="12700">
+            <a:solidFill>
+              <a:srgbClr val="DDE5EE"/>
+            </a:solidFill>
+          </a:ln>
+          <a:effectLst/>
+        </p:spPr>
+        <p:style>
+          <a:lnRef idx="1">
+            <a:schemeClr val="accent1"/>
+          </a:lnRef>
+          <a:fillRef idx="3">
+            <a:schemeClr val="accent1"/>
+          </a:fillRef>
+          <a:effectRef idx="2">
+            <a:schemeClr val="accent1"/>
+          </a:effectRef>
+          <a:fontRef idx="minor">
+            <a:schemeClr val="lt1"/>
+          </a:fontRef>
+        </p:style>
+        <p:txBody>
+          <a:bodyPr rtlCol="0" anchor="ctr"/>
+          <a:lstStyle/>
+          <a:p>
+            <a:pPr algn="ctr"/>
+          </a:p>
+        </p:txBody>
+      </p:sp>
+      <p:sp>
+        <p:nvSpPr>
+          <p:cNvPr id="29" name="TextBox 28"/>
           <p:cNvSpPr txBox="1"/>
           <p:nvPr/>
         </p:nvSpPr>
         <p:spPr>
           <a:xfrm>
-            <a:off x="5643562" y="2105025"/>
-            <a:ext cx="1714500" cy="228600"/>
+            <a:off x="3640137" y="3562350"/>
+            <a:ext cx="1543050" cy="285750"/>
           </a:xfrm>
           <a:prstGeom prst="rect">
             <a:avLst/>
@@ -12442,138 +12658,20 @@
               </a:lnSpc>
             </a:pPr>
             <a:r>
-              <a:rPr sz="900" b="0">
-                <a:solidFill>
-                  <a:srgbClr val="94A3B8"/>
+              <a:rPr sz="1100" b="1">
+                <a:solidFill>
+                  <a:srgbClr val="0B1D3A"/>
                 </a:solidFill>
                 <a:latin typeface="PingFang SC"/>
               </a:rPr>
-              <a:t>回本地小模型</a:t>
-            </a:r>
-          </a:p>
-        </p:txBody>
-      </p:sp>
-      <p:cxnSp>
-        <p:nvCxnSpPr>
-          <p:cNvPr id="24" name="Connector 23"/>
-          <p:cNvCxnSpPr/>
-          <p:nvPr/>
-        </p:nvCxnSpPr>
-        <p:spPr>
-          <a:xfrm>
-            <a:off x="4752975" y="4048125"/>
-            <a:ext cx="152400" cy="0"/>
-          </a:xfrm>
-          <a:prstGeom prst="line">
-            <a:avLst/>
-          </a:prstGeom>
-          <a:ln w="17780">
-            <a:solidFill>
-              <a:srgbClr val="475569"/>
-            </a:solidFill>
-          </a:ln>
-        </p:spPr>
-        <p:style>
-          <a:lnRef idx="2">
-            <a:schemeClr val="accent1"/>
-          </a:lnRef>
-          <a:fillRef idx="0">
-            <a:schemeClr val="accent1"/>
-          </a:fillRef>
-          <a:effectRef idx="1">
-            <a:schemeClr val="accent1"/>
-          </a:effectRef>
-          <a:fontRef idx="minor">
-            <a:schemeClr val="tx1"/>
-          </a:fontRef>
-        </p:style>
-      </p:cxnSp>
-      <p:sp>
-        <p:nvSpPr>
-          <p:cNvPr id="25" name="Isosceles Triangle 24"/>
-          <p:cNvSpPr/>
-          <p:nvPr/>
-        </p:nvSpPr>
-        <p:spPr>
-          <a:xfrm rot="5400000">
-            <a:off x="4819651" y="4005263"/>
-            <a:ext cx="85725" cy="85725"/>
-          </a:xfrm>
-          <a:prstGeom prst="triangle">
-            <a:avLst/>
-          </a:prstGeom>
-          <a:solidFill>
-            <a:srgbClr val="475569"/>
-          </a:solidFill>
-          <a:ln>
-            <a:noFill/>
-          </a:ln>
-          <a:effectLst/>
-        </p:spPr>
-        <p:style>
-          <a:lnRef idx="1">
-            <a:schemeClr val="accent1"/>
-          </a:lnRef>
-          <a:fillRef idx="3">
-            <a:schemeClr val="accent1"/>
-          </a:fillRef>
-          <a:effectRef idx="2">
-            <a:schemeClr val="accent1"/>
-          </a:effectRef>
-          <a:fontRef idx="minor">
-            <a:schemeClr val="lt1"/>
-          </a:fontRef>
-        </p:style>
-        <p:txBody>
-          <a:bodyPr rtlCol="0" anchor="ctr"/>
-          <a:lstStyle/>
-          <a:p>
-            <a:pPr algn="ctr"/>
-          </a:p>
-        </p:txBody>
-      </p:sp>
-      <p:sp>
-        <p:nvSpPr>
-          <p:cNvPr id="26" name="TextBox 25"/>
-          <p:cNvSpPr txBox="1"/>
-          <p:nvPr/>
-        </p:nvSpPr>
-        <p:spPr>
-          <a:xfrm>
-            <a:off x="3971925" y="3724275"/>
-            <a:ext cx="1714500" cy="228600"/>
-          </a:xfrm>
-          <a:prstGeom prst="rect">
-            <a:avLst/>
-          </a:prstGeom>
-          <a:noFill/>
-        </p:spPr>
-        <p:txBody>
-          <a:bodyPr wrap="square" anchor="ctr">
-            <a:spAutoFit/>
-          </a:bodyPr>
-          <a:lstStyle/>
-          <a:p>
-            <a:pPr algn="ctr">
-              <a:lnSpc>
-                <a:spcPct val="100000"/>
-              </a:lnSpc>
-            </a:pPr>
-            <a:r>
-              <a:rPr sz="900" b="0">
-                <a:solidFill>
-                  <a:srgbClr val="94A3B8"/>
-                </a:solidFill>
-                <a:latin typeface="PingFang SC"/>
-              </a:rPr>
-              <a:t>全部熔断→人工兜底|每级留痕+告警分级</a:t>
-            </a:r>
-          </a:p>
-        </p:txBody>
-      </p:sp>
-      <p:sp>
-        <p:nvSpPr>
-          <p:cNvPr id="27" name="TextBox 26"/>
+              <a:t>全部熔断→人</a:t>
+            </a:r>
+          </a:p>
+        </p:txBody>
+      </p:sp>
+      <p:sp>
+        <p:nvSpPr>
+          <p:cNvPr id="30" name="TextBox 29"/>
           <p:cNvSpPr txBox="1"/>
           <p:nvPr/>
         </p:nvSpPr>
@@ -12612,7 +12710,7 @@
       </p:sp>
       <p:sp>
         <p:nvSpPr>
-          <p:cNvPr id="28" name="TextBox 27"/>
+          <p:cNvPr id="31" name="TextBox 30"/>
           <p:cNvSpPr txBox="1"/>
           <p:nvPr/>
         </p:nvSpPr>
@@ -20191,7 +20289,7 @@
                 </a:solidFill>
                 <a:latin typeface="PingFang SC"/>
               </a:rPr>
-              <a:t>5. 报表/Trace 走从|读己之写实测通过</a:t>
+              <a:t>5. 报表/Trace 走从</a:t>
             </a:r>
           </a:p>
         </p:txBody>
@@ -28670,7 +28768,7 @@
         <p:spPr>
           <a:xfrm>
             <a:off x="365760" y="762000"/>
-            <a:ext cx="11460480" cy="1823258"/>
+            <a:ext cx="11460480" cy="2409305"/>
           </a:xfrm>
           <a:prstGeom prst="rect">
             <a:avLst/>
@@ -32175,14 +32273,682 @@
       </p:sp>
       <p:sp>
         <p:nvSpPr>
-          <p:cNvPr id="5" name="TextBox 4"/>
+          <p:cNvPr id="5" name="Rounded Rectangle 4"/>
+          <p:cNvSpPr/>
+          <p:nvPr/>
+        </p:nvSpPr>
+        <p:spPr>
+          <a:xfrm>
+            <a:off x="4935855" y="1333500"/>
+            <a:ext cx="2320290" cy="1066800"/>
+          </a:xfrm>
+          <a:prstGeom prst="roundRect">
+            <a:avLst>
+              <a:gd name="adj" fmla="val 8000"/>
+            </a:avLst>
+          </a:prstGeom>
+          <a:solidFill>
+            <a:srgbClr val="FFFFFF"/>
+          </a:solidFill>
+          <a:ln w="12700">
+            <a:solidFill>
+              <a:srgbClr val="8B5CF6"/>
+            </a:solidFill>
+          </a:ln>
+          <a:effectLst/>
+        </p:spPr>
+        <p:style>
+          <a:lnRef idx="1">
+            <a:schemeClr val="accent1"/>
+          </a:lnRef>
+          <a:fillRef idx="3">
+            <a:schemeClr val="accent1"/>
+          </a:fillRef>
+          <a:effectRef idx="2">
+            <a:schemeClr val="accent1"/>
+          </a:effectRef>
+          <a:fontRef idx="minor">
+            <a:schemeClr val="lt1"/>
+          </a:fontRef>
+        </p:style>
+        <p:txBody>
+          <a:bodyPr rtlCol="0" anchor="ctr"/>
+          <a:lstStyle/>
+          <a:p>
+            <a:pPr algn="ctr"/>
+          </a:p>
+        </p:txBody>
+      </p:sp>
+      <p:sp>
+        <p:nvSpPr>
+          <p:cNvPr id="6" name="Rectangle 5"/>
+          <p:cNvSpPr/>
+          <p:nvPr/>
+        </p:nvSpPr>
+        <p:spPr>
+          <a:xfrm>
+            <a:off x="4935855" y="1333500"/>
+            <a:ext cx="57150" cy="1066800"/>
+          </a:xfrm>
+          <a:prstGeom prst="rect">
+            <a:avLst/>
+          </a:prstGeom>
+          <a:solidFill>
+            <a:srgbClr val="8B5CF6"/>
+          </a:solidFill>
+          <a:ln>
+            <a:noFill/>
+          </a:ln>
+          <a:effectLst/>
+        </p:spPr>
+        <p:style>
+          <a:lnRef idx="1">
+            <a:schemeClr val="accent1"/>
+          </a:lnRef>
+          <a:fillRef idx="3">
+            <a:schemeClr val="accent1"/>
+          </a:fillRef>
+          <a:effectRef idx="2">
+            <a:schemeClr val="accent1"/>
+          </a:effectRef>
+          <a:fontRef idx="minor">
+            <a:schemeClr val="lt1"/>
+          </a:fontRef>
+        </p:style>
+        <p:txBody>
+          <a:bodyPr rtlCol="0" anchor="ctr"/>
+          <a:lstStyle/>
+          <a:p>
+            <a:pPr algn="ctr"/>
+          </a:p>
+        </p:txBody>
+      </p:sp>
+      <p:sp>
+        <p:nvSpPr>
+          <p:cNvPr id="7" name="TextBox 6"/>
           <p:cNvSpPr txBox="1"/>
           <p:nvPr/>
         </p:nvSpPr>
         <p:spPr>
           <a:xfrm>
-            <a:off x="9334500" y="0"/>
-            <a:ext cx="2667000" cy="704850"/>
+            <a:off x="5126355" y="1333500"/>
+            <a:ext cx="881710" cy="1066800"/>
+          </a:xfrm>
+          <a:prstGeom prst="rect">
+            <a:avLst/>
+          </a:prstGeom>
+          <a:noFill/>
+        </p:spPr>
+        <p:txBody>
+          <a:bodyPr wrap="square" anchor="ctr">
+            <a:spAutoFit/>
+          </a:bodyPr>
+          <a:lstStyle/>
+          <a:p>
+            <a:pPr algn="l">
+              <a:lnSpc>
+                <a:spcPct val="100000"/>
+              </a:lnSpc>
+            </a:pPr>
+            <a:r>
+              <a:rPr sz="1600" b="1">
+                <a:solidFill>
+                  <a:srgbClr val="8B5CF6"/>
+                </a:solidFill>
+                <a:latin typeface="PingFang SC"/>
+              </a:rPr>
+              <a:t>L3 语义缓存</a:t>
+            </a:r>
+          </a:p>
+        </p:txBody>
+      </p:sp>
+      <p:sp>
+        <p:nvSpPr>
+          <p:cNvPr id="8" name="TextBox 7"/>
+          <p:cNvSpPr txBox="1"/>
+          <p:nvPr/>
+        </p:nvSpPr>
+        <p:spPr>
+          <a:xfrm>
+            <a:off x="5863971" y="1333500"/>
+            <a:ext cx="1345768" cy="1066800"/>
+          </a:xfrm>
+          <a:prstGeom prst="rect">
+            <a:avLst/>
+          </a:prstGeom>
+          <a:noFill/>
+        </p:spPr>
+        <p:txBody>
+          <a:bodyPr wrap="square" anchor="ctr">
+            <a:spAutoFit/>
+          </a:bodyPr>
+          <a:lstStyle/>
+          <a:p>
+            <a:pPr algn="l">
+              <a:lnSpc>
+                <a:spcPct val="100000"/>
+              </a:lnSpc>
+            </a:pPr>
+            <a:r>
+              <a:rPr sz="1200" b="0">
+                <a:solidFill>
+                  <a:srgbClr val="475569"/>
+                </a:solidFill>
+                <a:latin typeface="PingFang SC"/>
+              </a:rPr>
+              <a:t>向量相似 τ=0.92(42.2%)</a:t>
+            </a:r>
+          </a:p>
+        </p:txBody>
+      </p:sp>
+      <p:cxnSp>
+        <p:nvCxnSpPr>
+          <p:cNvPr id="9" name="Connector 8"/>
+          <p:cNvCxnSpPr/>
+          <p:nvPr/>
+        </p:nvCxnSpPr>
+        <p:spPr>
+          <a:xfrm>
+            <a:off x="6096000" y="2419350"/>
+            <a:ext cx="0" cy="171450"/>
+          </a:xfrm>
+          <a:prstGeom prst="line">
+            <a:avLst/>
+          </a:prstGeom>
+          <a:ln w="15240">
+            <a:solidFill>
+              <a:srgbClr val="94A3B8"/>
+            </a:solidFill>
+          </a:ln>
+        </p:spPr>
+        <p:style>
+          <a:lnRef idx="2">
+            <a:schemeClr val="accent1"/>
+          </a:lnRef>
+          <a:fillRef idx="0">
+            <a:schemeClr val="accent1"/>
+          </a:fillRef>
+          <a:effectRef idx="1">
+            <a:schemeClr val="accent1"/>
+          </a:effectRef>
+          <a:fontRef idx="minor">
+            <a:schemeClr val="tx1"/>
+          </a:fontRef>
+        </p:style>
+      </p:cxnSp>
+      <p:sp>
+        <p:nvSpPr>
+          <p:cNvPr id="10" name="Isosceles Triangle 9"/>
+          <p:cNvSpPr/>
+          <p:nvPr/>
+        </p:nvSpPr>
+        <p:spPr>
+          <a:xfrm rot="10800000">
+            <a:off x="6053138" y="2505076"/>
+            <a:ext cx="85725" cy="85725"/>
+          </a:xfrm>
+          <a:prstGeom prst="triangle">
+            <a:avLst/>
+          </a:prstGeom>
+          <a:solidFill>
+            <a:srgbClr val="94A3B8"/>
+          </a:solidFill>
+          <a:ln>
+            <a:noFill/>
+          </a:ln>
+          <a:effectLst/>
+        </p:spPr>
+        <p:style>
+          <a:lnRef idx="1">
+            <a:schemeClr val="accent1"/>
+          </a:lnRef>
+          <a:fillRef idx="3">
+            <a:schemeClr val="accent1"/>
+          </a:fillRef>
+          <a:effectRef idx="2">
+            <a:schemeClr val="accent1"/>
+          </a:effectRef>
+          <a:fontRef idx="minor">
+            <a:schemeClr val="lt1"/>
+          </a:fontRef>
+        </p:style>
+        <p:txBody>
+          <a:bodyPr rtlCol="0" anchor="ctr"/>
+          <a:lstStyle/>
+          <a:p>
+            <a:pPr algn="ctr"/>
+          </a:p>
+        </p:txBody>
+      </p:sp>
+      <p:sp>
+        <p:nvSpPr>
+          <p:cNvPr id="11" name="Rounded Rectangle 10"/>
+          <p:cNvSpPr/>
+          <p:nvPr/>
+        </p:nvSpPr>
+        <p:spPr>
+          <a:xfrm>
+            <a:off x="4134802" y="2609850"/>
+            <a:ext cx="3922395" cy="1066800"/>
+          </a:xfrm>
+          <a:prstGeom prst="roundRect">
+            <a:avLst>
+              <a:gd name="adj" fmla="val 8000"/>
+            </a:avLst>
+          </a:prstGeom>
+          <a:solidFill>
+            <a:srgbClr val="FFFFFF"/>
+          </a:solidFill>
+          <a:ln w="12700">
+            <a:solidFill>
+              <a:srgbClr val="14B8A6"/>
+            </a:solidFill>
+          </a:ln>
+          <a:effectLst/>
+        </p:spPr>
+        <p:style>
+          <a:lnRef idx="1">
+            <a:schemeClr val="accent1"/>
+          </a:lnRef>
+          <a:fillRef idx="3">
+            <a:schemeClr val="accent1"/>
+          </a:fillRef>
+          <a:effectRef idx="2">
+            <a:schemeClr val="accent1"/>
+          </a:effectRef>
+          <a:fontRef idx="minor">
+            <a:schemeClr val="lt1"/>
+          </a:fontRef>
+        </p:style>
+        <p:txBody>
+          <a:bodyPr rtlCol="0" anchor="ctr"/>
+          <a:lstStyle/>
+          <a:p>
+            <a:pPr algn="ctr"/>
+          </a:p>
+        </p:txBody>
+      </p:sp>
+      <p:sp>
+        <p:nvSpPr>
+          <p:cNvPr id="12" name="Rectangle 11"/>
+          <p:cNvSpPr/>
+          <p:nvPr/>
+        </p:nvSpPr>
+        <p:spPr>
+          <a:xfrm>
+            <a:off x="4134802" y="2609850"/>
+            <a:ext cx="57150" cy="1066800"/>
+          </a:xfrm>
+          <a:prstGeom prst="rect">
+            <a:avLst/>
+          </a:prstGeom>
+          <a:solidFill>
+            <a:srgbClr val="14B8A6"/>
+          </a:solidFill>
+          <a:ln>
+            <a:noFill/>
+          </a:ln>
+          <a:effectLst/>
+        </p:spPr>
+        <p:style>
+          <a:lnRef idx="1">
+            <a:schemeClr val="accent1"/>
+          </a:lnRef>
+          <a:fillRef idx="3">
+            <a:schemeClr val="accent1"/>
+          </a:fillRef>
+          <a:effectRef idx="2">
+            <a:schemeClr val="accent1"/>
+          </a:effectRef>
+          <a:fontRef idx="minor">
+            <a:schemeClr val="lt1"/>
+          </a:fontRef>
+        </p:style>
+        <p:txBody>
+          <a:bodyPr rtlCol="0" anchor="ctr"/>
+          <a:lstStyle/>
+          <a:p>
+            <a:pPr algn="ctr"/>
+          </a:p>
+        </p:txBody>
+      </p:sp>
+      <p:sp>
+        <p:nvSpPr>
+          <p:cNvPr id="13" name="TextBox 12"/>
+          <p:cNvSpPr txBox="1"/>
+          <p:nvPr/>
+        </p:nvSpPr>
+        <p:spPr>
+          <a:xfrm>
+            <a:off x="4325302" y="2609850"/>
+            <a:ext cx="1490510" cy="1066800"/>
+          </a:xfrm>
+          <a:prstGeom prst="rect">
+            <a:avLst/>
+          </a:prstGeom>
+          <a:noFill/>
+        </p:spPr>
+        <p:txBody>
+          <a:bodyPr wrap="square" anchor="ctr">
+            <a:spAutoFit/>
+          </a:bodyPr>
+          <a:lstStyle/>
+          <a:p>
+            <a:pPr algn="l">
+              <a:lnSpc>
+                <a:spcPct val="100000"/>
+              </a:lnSpc>
+            </a:pPr>
+            <a:r>
+              <a:rPr sz="1600" b="1">
+                <a:solidFill>
+                  <a:srgbClr val="14B8A6"/>
+                </a:solidFill>
+                <a:latin typeface="PingFang SC"/>
+              </a:rPr>
+              <a:t>L2 Redis</a:t>
+            </a:r>
+          </a:p>
+        </p:txBody>
+      </p:sp>
+      <p:sp>
+        <p:nvSpPr>
+          <p:cNvPr id="14" name="TextBox 13"/>
+          <p:cNvSpPr txBox="1"/>
+          <p:nvPr/>
+        </p:nvSpPr>
+        <p:spPr>
+          <a:xfrm>
+            <a:off x="5703760" y="2609850"/>
+            <a:ext cx="2274989" cy="1066800"/>
+          </a:xfrm>
+          <a:prstGeom prst="rect">
+            <a:avLst/>
+          </a:prstGeom>
+          <a:noFill/>
+        </p:spPr>
+        <p:txBody>
+          <a:bodyPr wrap="square" anchor="ctr">
+            <a:spAutoFit/>
+          </a:bodyPr>
+          <a:lstStyle/>
+          <a:p>
+            <a:pPr algn="l">
+              <a:lnSpc>
+                <a:spcPct val="100000"/>
+              </a:lnSpc>
+            </a:pPr>
+            <a:r>
+              <a:rPr sz="1200" b="0">
+                <a:solidFill>
+                  <a:srgbClr val="475569"/>
+                </a:solidFill>
+                <a:latin typeface="PingFang SC"/>
+              </a:rPr>
+              <a:t>跨进程共享(TTL 分级)</a:t>
+            </a:r>
+          </a:p>
+        </p:txBody>
+      </p:sp>
+      <p:cxnSp>
+        <p:nvCxnSpPr>
+          <p:cNvPr id="15" name="Connector 14"/>
+          <p:cNvCxnSpPr/>
+          <p:nvPr/>
+        </p:nvCxnSpPr>
+        <p:spPr>
+          <a:xfrm>
+            <a:off x="6096000" y="3695700"/>
+            <a:ext cx="0" cy="171450"/>
+          </a:xfrm>
+          <a:prstGeom prst="line">
+            <a:avLst/>
+          </a:prstGeom>
+          <a:ln w="15240">
+            <a:solidFill>
+              <a:srgbClr val="94A3B8"/>
+            </a:solidFill>
+          </a:ln>
+        </p:spPr>
+        <p:style>
+          <a:lnRef idx="2">
+            <a:schemeClr val="accent1"/>
+          </a:lnRef>
+          <a:fillRef idx="0">
+            <a:schemeClr val="accent1"/>
+          </a:fillRef>
+          <a:effectRef idx="1">
+            <a:schemeClr val="accent1"/>
+          </a:effectRef>
+          <a:fontRef idx="minor">
+            <a:schemeClr val="tx1"/>
+          </a:fontRef>
+        </p:style>
+      </p:cxnSp>
+      <p:sp>
+        <p:nvSpPr>
+          <p:cNvPr id="16" name="Isosceles Triangle 15"/>
+          <p:cNvSpPr/>
+          <p:nvPr/>
+        </p:nvSpPr>
+        <p:spPr>
+          <a:xfrm rot="10800000">
+            <a:off x="6053138" y="3781426"/>
+            <a:ext cx="85725" cy="85725"/>
+          </a:xfrm>
+          <a:prstGeom prst="triangle">
+            <a:avLst/>
+          </a:prstGeom>
+          <a:solidFill>
+            <a:srgbClr val="94A3B8"/>
+          </a:solidFill>
+          <a:ln>
+            <a:noFill/>
+          </a:ln>
+          <a:effectLst/>
+        </p:spPr>
+        <p:style>
+          <a:lnRef idx="1">
+            <a:schemeClr val="accent1"/>
+          </a:lnRef>
+          <a:fillRef idx="3">
+            <a:schemeClr val="accent1"/>
+          </a:fillRef>
+          <a:effectRef idx="2">
+            <a:schemeClr val="accent1"/>
+          </a:effectRef>
+          <a:fontRef idx="minor">
+            <a:schemeClr val="lt1"/>
+          </a:fontRef>
+        </p:style>
+        <p:txBody>
+          <a:bodyPr rtlCol="0" anchor="ctr"/>
+          <a:lstStyle/>
+          <a:p>
+            <a:pPr algn="ctr"/>
+          </a:p>
+        </p:txBody>
+      </p:sp>
+      <p:sp>
+        <p:nvSpPr>
+          <p:cNvPr id="17" name="Rounded Rectangle 16"/>
+          <p:cNvSpPr/>
+          <p:nvPr/>
+        </p:nvSpPr>
+        <p:spPr>
+          <a:xfrm>
+            <a:off x="3333750" y="3886200"/>
+            <a:ext cx="5524500" cy="1066800"/>
+          </a:xfrm>
+          <a:prstGeom prst="roundRect">
+            <a:avLst>
+              <a:gd name="adj" fmla="val 8000"/>
+            </a:avLst>
+          </a:prstGeom>
+          <a:solidFill>
+            <a:srgbClr val="FFFFFF"/>
+          </a:solidFill>
+          <a:ln w="12700">
+            <a:solidFill>
+              <a:srgbClr val="2563EB"/>
+            </a:solidFill>
+          </a:ln>
+          <a:effectLst/>
+        </p:spPr>
+        <p:style>
+          <a:lnRef idx="1">
+            <a:schemeClr val="accent1"/>
+          </a:lnRef>
+          <a:fillRef idx="3">
+            <a:schemeClr val="accent1"/>
+          </a:fillRef>
+          <a:effectRef idx="2">
+            <a:schemeClr val="accent1"/>
+          </a:effectRef>
+          <a:fontRef idx="minor">
+            <a:schemeClr val="lt1"/>
+          </a:fontRef>
+        </p:style>
+        <p:txBody>
+          <a:bodyPr rtlCol="0" anchor="ctr"/>
+          <a:lstStyle/>
+          <a:p>
+            <a:pPr algn="ctr"/>
+          </a:p>
+        </p:txBody>
+      </p:sp>
+      <p:sp>
+        <p:nvSpPr>
+          <p:cNvPr id="18" name="Rectangle 17"/>
+          <p:cNvSpPr/>
+          <p:nvPr/>
+        </p:nvSpPr>
+        <p:spPr>
+          <a:xfrm>
+            <a:off x="3333750" y="3886200"/>
+            <a:ext cx="57150" cy="1066800"/>
+          </a:xfrm>
+          <a:prstGeom prst="rect">
+            <a:avLst/>
+          </a:prstGeom>
+          <a:solidFill>
+            <a:srgbClr val="2563EB"/>
+          </a:solidFill>
+          <a:ln>
+            <a:noFill/>
+          </a:ln>
+          <a:effectLst/>
+        </p:spPr>
+        <p:style>
+          <a:lnRef idx="1">
+            <a:schemeClr val="accent1"/>
+          </a:lnRef>
+          <a:fillRef idx="3">
+            <a:schemeClr val="accent1"/>
+          </a:fillRef>
+          <a:effectRef idx="2">
+            <a:schemeClr val="accent1"/>
+          </a:effectRef>
+          <a:fontRef idx="minor">
+            <a:schemeClr val="lt1"/>
+          </a:fontRef>
+        </p:style>
+        <p:txBody>
+          <a:bodyPr rtlCol="0" anchor="ctr"/>
+          <a:lstStyle/>
+          <a:p>
+            <a:pPr algn="ctr"/>
+          </a:p>
+        </p:txBody>
+      </p:sp>
+      <p:sp>
+        <p:nvSpPr>
+          <p:cNvPr id="19" name="TextBox 18"/>
+          <p:cNvSpPr txBox="1"/>
+          <p:nvPr/>
+        </p:nvSpPr>
+        <p:spPr>
+          <a:xfrm>
+            <a:off x="3524250" y="3886200"/>
+            <a:ext cx="2099310" cy="1066800"/>
+          </a:xfrm>
+          <a:prstGeom prst="rect">
+            <a:avLst/>
+          </a:prstGeom>
+          <a:noFill/>
+        </p:spPr>
+        <p:txBody>
+          <a:bodyPr wrap="square" anchor="ctr">
+            <a:spAutoFit/>
+          </a:bodyPr>
+          <a:lstStyle/>
+          <a:p>
+            <a:pPr algn="l">
+              <a:lnSpc>
+                <a:spcPct val="100000"/>
+              </a:lnSpc>
+            </a:pPr>
+            <a:r>
+              <a:rPr sz="1600" b="1">
+                <a:solidFill>
+                  <a:srgbClr val="2563EB"/>
+                </a:solidFill>
+                <a:latin typeface="PingFang SC"/>
+              </a:rPr>
+              <a:t>L1 进程内 LRU</a:t>
+            </a:r>
+          </a:p>
+        </p:txBody>
+      </p:sp>
+      <p:sp>
+        <p:nvSpPr>
+          <p:cNvPr id="20" name="TextBox 19"/>
+          <p:cNvSpPr txBox="1"/>
+          <p:nvPr/>
+        </p:nvSpPr>
+        <p:spPr>
+          <a:xfrm>
+            <a:off x="5543550" y="3886200"/>
+            <a:ext cx="3204210" cy="1066800"/>
+          </a:xfrm>
+          <a:prstGeom prst="rect">
+            <a:avLst/>
+          </a:prstGeom>
+          <a:noFill/>
+        </p:spPr>
+        <p:txBody>
+          <a:bodyPr wrap="square" anchor="ctr">
+            <a:spAutoFit/>
+          </a:bodyPr>
+          <a:lstStyle/>
+          <a:p>
+            <a:pPr algn="l">
+              <a:lnSpc>
+                <a:spcPct val="100000"/>
+              </a:lnSpc>
+            </a:pPr>
+            <a:r>
+              <a:rPr sz="1200" b="0">
+                <a:solidFill>
+                  <a:srgbClr val="475569"/>
+                </a:solidFill>
+                <a:latin typeface="PingFang SC"/>
+              </a:rPr>
+              <a:t>纳秒级(容量按热点)</a:t>
+            </a:r>
+          </a:p>
+        </p:txBody>
+      </p:sp>
+      <p:sp>
+        <p:nvSpPr>
+          <p:cNvPr id="21" name="TextBox 20"/>
+          <p:cNvSpPr txBox="1"/>
+          <p:nvPr/>
+        </p:nvSpPr>
+        <p:spPr>
+          <a:xfrm>
+            <a:off x="10287000" y="6534150"/>
+            <a:ext cx="1619250" cy="266700"/>
           </a:xfrm>
           <a:prstGeom prst="rect">
             <a:avLst/>
@@ -32201,713 +32967,6 @@
               </a:lnSpc>
             </a:pPr>
             <a:r>
-              <a:rPr sz="1100" b="0">
-                <a:solidFill>
-                  <a:srgbClr val="94A3B8"/>
-                </a:solidFill>
-                <a:latin typeface="PingFang SC"/>
-              </a:rPr>
-              <a:t>L3 语义缓存:向量相似 τ=0.92(42.2%);L2 Redis:跨进程共享(TTL 分级);L1 进程内 LRU:纳秒级(容量按热点)|Tool Result Cache:幂等读 60s|层级自底向上加速</a:t>
-            </a:r>
-          </a:p>
-        </p:txBody>
-      </p:sp>
-      <p:sp>
-        <p:nvSpPr>
-          <p:cNvPr id="6" name="Rounded Rectangle 5"/>
-          <p:cNvSpPr/>
-          <p:nvPr/>
-        </p:nvSpPr>
-        <p:spPr>
-          <a:xfrm>
-            <a:off x="4935855" y="1333500"/>
-            <a:ext cx="2320290" cy="1066800"/>
-          </a:xfrm>
-          <a:prstGeom prst="roundRect">
-            <a:avLst>
-              <a:gd name="adj" fmla="val 8000"/>
-            </a:avLst>
-          </a:prstGeom>
-          <a:solidFill>
-            <a:srgbClr val="FFFFFF"/>
-          </a:solidFill>
-          <a:ln w="12700">
-            <a:solidFill>
-              <a:srgbClr val="8B5CF6"/>
-            </a:solidFill>
-          </a:ln>
-          <a:effectLst/>
-        </p:spPr>
-        <p:style>
-          <a:lnRef idx="1">
-            <a:schemeClr val="accent1"/>
-          </a:lnRef>
-          <a:fillRef idx="3">
-            <a:schemeClr val="accent1"/>
-          </a:fillRef>
-          <a:effectRef idx="2">
-            <a:schemeClr val="accent1"/>
-          </a:effectRef>
-          <a:fontRef idx="minor">
-            <a:schemeClr val="lt1"/>
-          </a:fontRef>
-        </p:style>
-        <p:txBody>
-          <a:bodyPr rtlCol="0" anchor="ctr"/>
-          <a:lstStyle/>
-          <a:p>
-            <a:pPr algn="ctr"/>
-          </a:p>
-        </p:txBody>
-      </p:sp>
-      <p:sp>
-        <p:nvSpPr>
-          <p:cNvPr id="7" name="Rectangle 6"/>
-          <p:cNvSpPr/>
-          <p:nvPr/>
-        </p:nvSpPr>
-        <p:spPr>
-          <a:xfrm>
-            <a:off x="4935855" y="1333500"/>
-            <a:ext cx="57150" cy="1066800"/>
-          </a:xfrm>
-          <a:prstGeom prst="rect">
-            <a:avLst/>
-          </a:prstGeom>
-          <a:solidFill>
-            <a:srgbClr val="8B5CF6"/>
-          </a:solidFill>
-          <a:ln>
-            <a:noFill/>
-          </a:ln>
-          <a:effectLst/>
-        </p:spPr>
-        <p:style>
-          <a:lnRef idx="1">
-            <a:schemeClr val="accent1"/>
-          </a:lnRef>
-          <a:fillRef idx="3">
-            <a:schemeClr val="accent1"/>
-          </a:fillRef>
-          <a:effectRef idx="2">
-            <a:schemeClr val="accent1"/>
-          </a:effectRef>
-          <a:fontRef idx="minor">
-            <a:schemeClr val="lt1"/>
-          </a:fontRef>
-        </p:style>
-        <p:txBody>
-          <a:bodyPr rtlCol="0" anchor="ctr"/>
-          <a:lstStyle/>
-          <a:p>
-            <a:pPr algn="ctr"/>
-          </a:p>
-        </p:txBody>
-      </p:sp>
-      <p:sp>
-        <p:nvSpPr>
-          <p:cNvPr id="8" name="TextBox 7"/>
-          <p:cNvSpPr txBox="1"/>
-          <p:nvPr/>
-        </p:nvSpPr>
-        <p:spPr>
-          <a:xfrm>
-            <a:off x="5126355" y="1333500"/>
-            <a:ext cx="881710" cy="1066800"/>
-          </a:xfrm>
-          <a:prstGeom prst="rect">
-            <a:avLst/>
-          </a:prstGeom>
-          <a:noFill/>
-        </p:spPr>
-        <p:txBody>
-          <a:bodyPr wrap="square" anchor="ctr">
-            <a:spAutoFit/>
-          </a:bodyPr>
-          <a:lstStyle/>
-          <a:p>
-            <a:pPr algn="l">
-              <a:lnSpc>
-                <a:spcPct val="100000"/>
-              </a:lnSpc>
-            </a:pPr>
-            <a:r>
-              <a:rPr sz="1600" b="1">
-                <a:solidFill>
-                  <a:srgbClr val="8B5CF6"/>
-                </a:solidFill>
-                <a:latin typeface="PingFang SC"/>
-              </a:rPr>
-              <a:t>L3 语义缓存</a:t>
-            </a:r>
-          </a:p>
-        </p:txBody>
-      </p:sp>
-      <p:sp>
-        <p:nvSpPr>
-          <p:cNvPr id="9" name="TextBox 8"/>
-          <p:cNvSpPr txBox="1"/>
-          <p:nvPr/>
-        </p:nvSpPr>
-        <p:spPr>
-          <a:xfrm>
-            <a:off x="5863971" y="1333500"/>
-            <a:ext cx="1345768" cy="1066800"/>
-          </a:xfrm>
-          <a:prstGeom prst="rect">
-            <a:avLst/>
-          </a:prstGeom>
-          <a:noFill/>
-        </p:spPr>
-        <p:txBody>
-          <a:bodyPr wrap="square" anchor="ctr">
-            <a:spAutoFit/>
-          </a:bodyPr>
-          <a:lstStyle/>
-          <a:p>
-            <a:pPr algn="l">
-              <a:lnSpc>
-                <a:spcPct val="100000"/>
-              </a:lnSpc>
-            </a:pPr>
-            <a:r>
-              <a:rPr sz="1200" b="0">
-                <a:solidFill>
-                  <a:srgbClr val="475569"/>
-                </a:solidFill>
-                <a:latin typeface="PingFang SC"/>
-              </a:rPr>
-              <a:t>向量相似 τ=0.92(42.2%)</a:t>
-            </a:r>
-          </a:p>
-        </p:txBody>
-      </p:sp>
-      <p:cxnSp>
-        <p:nvCxnSpPr>
-          <p:cNvPr id="10" name="Connector 9"/>
-          <p:cNvCxnSpPr/>
-          <p:nvPr/>
-        </p:nvCxnSpPr>
-        <p:spPr>
-          <a:xfrm>
-            <a:off x="6096000" y="2419350"/>
-            <a:ext cx="0" cy="171450"/>
-          </a:xfrm>
-          <a:prstGeom prst="line">
-            <a:avLst/>
-          </a:prstGeom>
-          <a:ln w="15240">
-            <a:solidFill>
-              <a:srgbClr val="94A3B8"/>
-            </a:solidFill>
-          </a:ln>
-        </p:spPr>
-        <p:style>
-          <a:lnRef idx="2">
-            <a:schemeClr val="accent1"/>
-          </a:lnRef>
-          <a:fillRef idx="0">
-            <a:schemeClr val="accent1"/>
-          </a:fillRef>
-          <a:effectRef idx="1">
-            <a:schemeClr val="accent1"/>
-          </a:effectRef>
-          <a:fontRef idx="minor">
-            <a:schemeClr val="tx1"/>
-          </a:fontRef>
-        </p:style>
-      </p:cxnSp>
-      <p:sp>
-        <p:nvSpPr>
-          <p:cNvPr id="11" name="Isosceles Triangle 10"/>
-          <p:cNvSpPr/>
-          <p:nvPr/>
-        </p:nvSpPr>
-        <p:spPr>
-          <a:xfrm rot="10800000">
-            <a:off x="6053138" y="2505076"/>
-            <a:ext cx="85725" cy="85725"/>
-          </a:xfrm>
-          <a:prstGeom prst="triangle">
-            <a:avLst/>
-          </a:prstGeom>
-          <a:solidFill>
-            <a:srgbClr val="94A3B8"/>
-          </a:solidFill>
-          <a:ln>
-            <a:noFill/>
-          </a:ln>
-          <a:effectLst/>
-        </p:spPr>
-        <p:style>
-          <a:lnRef idx="1">
-            <a:schemeClr val="accent1"/>
-          </a:lnRef>
-          <a:fillRef idx="3">
-            <a:schemeClr val="accent1"/>
-          </a:fillRef>
-          <a:effectRef idx="2">
-            <a:schemeClr val="accent1"/>
-          </a:effectRef>
-          <a:fontRef idx="minor">
-            <a:schemeClr val="lt1"/>
-          </a:fontRef>
-        </p:style>
-        <p:txBody>
-          <a:bodyPr rtlCol="0" anchor="ctr"/>
-          <a:lstStyle/>
-          <a:p>
-            <a:pPr algn="ctr"/>
-          </a:p>
-        </p:txBody>
-      </p:sp>
-      <p:sp>
-        <p:nvSpPr>
-          <p:cNvPr id="12" name="Rounded Rectangle 11"/>
-          <p:cNvSpPr/>
-          <p:nvPr/>
-        </p:nvSpPr>
-        <p:spPr>
-          <a:xfrm>
-            <a:off x="4134802" y="2609850"/>
-            <a:ext cx="3922395" cy="1066800"/>
-          </a:xfrm>
-          <a:prstGeom prst="roundRect">
-            <a:avLst>
-              <a:gd name="adj" fmla="val 8000"/>
-            </a:avLst>
-          </a:prstGeom>
-          <a:solidFill>
-            <a:srgbClr val="FFFFFF"/>
-          </a:solidFill>
-          <a:ln w="12700">
-            <a:solidFill>
-              <a:srgbClr val="14B8A6"/>
-            </a:solidFill>
-          </a:ln>
-          <a:effectLst/>
-        </p:spPr>
-        <p:style>
-          <a:lnRef idx="1">
-            <a:schemeClr val="accent1"/>
-          </a:lnRef>
-          <a:fillRef idx="3">
-            <a:schemeClr val="accent1"/>
-          </a:fillRef>
-          <a:effectRef idx="2">
-            <a:schemeClr val="accent1"/>
-          </a:effectRef>
-          <a:fontRef idx="minor">
-            <a:schemeClr val="lt1"/>
-          </a:fontRef>
-        </p:style>
-        <p:txBody>
-          <a:bodyPr rtlCol="0" anchor="ctr"/>
-          <a:lstStyle/>
-          <a:p>
-            <a:pPr algn="ctr"/>
-          </a:p>
-        </p:txBody>
-      </p:sp>
-      <p:sp>
-        <p:nvSpPr>
-          <p:cNvPr id="13" name="Rectangle 12"/>
-          <p:cNvSpPr/>
-          <p:nvPr/>
-        </p:nvSpPr>
-        <p:spPr>
-          <a:xfrm>
-            <a:off x="4134802" y="2609850"/>
-            <a:ext cx="57150" cy="1066800"/>
-          </a:xfrm>
-          <a:prstGeom prst="rect">
-            <a:avLst/>
-          </a:prstGeom>
-          <a:solidFill>
-            <a:srgbClr val="14B8A6"/>
-          </a:solidFill>
-          <a:ln>
-            <a:noFill/>
-          </a:ln>
-          <a:effectLst/>
-        </p:spPr>
-        <p:style>
-          <a:lnRef idx="1">
-            <a:schemeClr val="accent1"/>
-          </a:lnRef>
-          <a:fillRef idx="3">
-            <a:schemeClr val="accent1"/>
-          </a:fillRef>
-          <a:effectRef idx="2">
-            <a:schemeClr val="accent1"/>
-          </a:effectRef>
-          <a:fontRef idx="minor">
-            <a:schemeClr val="lt1"/>
-          </a:fontRef>
-        </p:style>
-        <p:txBody>
-          <a:bodyPr rtlCol="0" anchor="ctr"/>
-          <a:lstStyle/>
-          <a:p>
-            <a:pPr algn="ctr"/>
-          </a:p>
-        </p:txBody>
-      </p:sp>
-      <p:sp>
-        <p:nvSpPr>
-          <p:cNvPr id="14" name="TextBox 13"/>
-          <p:cNvSpPr txBox="1"/>
-          <p:nvPr/>
-        </p:nvSpPr>
-        <p:spPr>
-          <a:xfrm>
-            <a:off x="4325302" y="2609850"/>
-            <a:ext cx="1490510" cy="1066800"/>
-          </a:xfrm>
-          <a:prstGeom prst="rect">
-            <a:avLst/>
-          </a:prstGeom>
-          <a:noFill/>
-        </p:spPr>
-        <p:txBody>
-          <a:bodyPr wrap="square" anchor="ctr">
-            <a:spAutoFit/>
-          </a:bodyPr>
-          <a:lstStyle/>
-          <a:p>
-            <a:pPr algn="l">
-              <a:lnSpc>
-                <a:spcPct val="100000"/>
-              </a:lnSpc>
-            </a:pPr>
-            <a:r>
-              <a:rPr sz="1600" b="1">
-                <a:solidFill>
-                  <a:srgbClr val="14B8A6"/>
-                </a:solidFill>
-                <a:latin typeface="PingFang SC"/>
-              </a:rPr>
-              <a:t>L2 Redis</a:t>
-            </a:r>
-          </a:p>
-        </p:txBody>
-      </p:sp>
-      <p:sp>
-        <p:nvSpPr>
-          <p:cNvPr id="15" name="TextBox 14"/>
-          <p:cNvSpPr txBox="1"/>
-          <p:nvPr/>
-        </p:nvSpPr>
-        <p:spPr>
-          <a:xfrm>
-            <a:off x="5703760" y="2609850"/>
-            <a:ext cx="2274989" cy="1066800"/>
-          </a:xfrm>
-          <a:prstGeom prst="rect">
-            <a:avLst/>
-          </a:prstGeom>
-          <a:noFill/>
-        </p:spPr>
-        <p:txBody>
-          <a:bodyPr wrap="square" anchor="ctr">
-            <a:spAutoFit/>
-          </a:bodyPr>
-          <a:lstStyle/>
-          <a:p>
-            <a:pPr algn="l">
-              <a:lnSpc>
-                <a:spcPct val="100000"/>
-              </a:lnSpc>
-            </a:pPr>
-            <a:r>
-              <a:rPr sz="1200" b="0">
-                <a:solidFill>
-                  <a:srgbClr val="475569"/>
-                </a:solidFill>
-                <a:latin typeface="PingFang SC"/>
-              </a:rPr>
-              <a:t>跨进程共享(TTL 分级)</a:t>
-            </a:r>
-          </a:p>
-        </p:txBody>
-      </p:sp>
-      <p:cxnSp>
-        <p:nvCxnSpPr>
-          <p:cNvPr id="16" name="Connector 15"/>
-          <p:cNvCxnSpPr/>
-          <p:nvPr/>
-        </p:nvCxnSpPr>
-        <p:spPr>
-          <a:xfrm>
-            <a:off x="6096000" y="3695700"/>
-            <a:ext cx="0" cy="171450"/>
-          </a:xfrm>
-          <a:prstGeom prst="line">
-            <a:avLst/>
-          </a:prstGeom>
-          <a:ln w="15240">
-            <a:solidFill>
-              <a:srgbClr val="94A3B8"/>
-            </a:solidFill>
-          </a:ln>
-        </p:spPr>
-        <p:style>
-          <a:lnRef idx="2">
-            <a:schemeClr val="accent1"/>
-          </a:lnRef>
-          <a:fillRef idx="0">
-            <a:schemeClr val="accent1"/>
-          </a:fillRef>
-          <a:effectRef idx="1">
-            <a:schemeClr val="accent1"/>
-          </a:effectRef>
-          <a:fontRef idx="minor">
-            <a:schemeClr val="tx1"/>
-          </a:fontRef>
-        </p:style>
-      </p:cxnSp>
-      <p:sp>
-        <p:nvSpPr>
-          <p:cNvPr id="17" name="Isosceles Triangle 16"/>
-          <p:cNvSpPr/>
-          <p:nvPr/>
-        </p:nvSpPr>
-        <p:spPr>
-          <a:xfrm rot="10800000">
-            <a:off x="6053138" y="3781426"/>
-            <a:ext cx="85725" cy="85725"/>
-          </a:xfrm>
-          <a:prstGeom prst="triangle">
-            <a:avLst/>
-          </a:prstGeom>
-          <a:solidFill>
-            <a:srgbClr val="94A3B8"/>
-          </a:solidFill>
-          <a:ln>
-            <a:noFill/>
-          </a:ln>
-          <a:effectLst/>
-        </p:spPr>
-        <p:style>
-          <a:lnRef idx="1">
-            <a:schemeClr val="accent1"/>
-          </a:lnRef>
-          <a:fillRef idx="3">
-            <a:schemeClr val="accent1"/>
-          </a:fillRef>
-          <a:effectRef idx="2">
-            <a:schemeClr val="accent1"/>
-          </a:effectRef>
-          <a:fontRef idx="minor">
-            <a:schemeClr val="lt1"/>
-          </a:fontRef>
-        </p:style>
-        <p:txBody>
-          <a:bodyPr rtlCol="0" anchor="ctr"/>
-          <a:lstStyle/>
-          <a:p>
-            <a:pPr algn="ctr"/>
-          </a:p>
-        </p:txBody>
-      </p:sp>
-      <p:sp>
-        <p:nvSpPr>
-          <p:cNvPr id="18" name="Rounded Rectangle 17"/>
-          <p:cNvSpPr/>
-          <p:nvPr/>
-        </p:nvSpPr>
-        <p:spPr>
-          <a:xfrm>
-            <a:off x="3333750" y="3886200"/>
-            <a:ext cx="5524500" cy="1066800"/>
-          </a:xfrm>
-          <a:prstGeom prst="roundRect">
-            <a:avLst>
-              <a:gd name="adj" fmla="val 8000"/>
-            </a:avLst>
-          </a:prstGeom>
-          <a:solidFill>
-            <a:srgbClr val="FFFFFF"/>
-          </a:solidFill>
-          <a:ln w="12700">
-            <a:solidFill>
-              <a:srgbClr val="2563EB"/>
-            </a:solidFill>
-          </a:ln>
-          <a:effectLst/>
-        </p:spPr>
-        <p:style>
-          <a:lnRef idx="1">
-            <a:schemeClr val="accent1"/>
-          </a:lnRef>
-          <a:fillRef idx="3">
-            <a:schemeClr val="accent1"/>
-          </a:fillRef>
-          <a:effectRef idx="2">
-            <a:schemeClr val="accent1"/>
-          </a:effectRef>
-          <a:fontRef idx="minor">
-            <a:schemeClr val="lt1"/>
-          </a:fontRef>
-        </p:style>
-        <p:txBody>
-          <a:bodyPr rtlCol="0" anchor="ctr"/>
-          <a:lstStyle/>
-          <a:p>
-            <a:pPr algn="ctr"/>
-          </a:p>
-        </p:txBody>
-      </p:sp>
-      <p:sp>
-        <p:nvSpPr>
-          <p:cNvPr id="19" name="Rectangle 18"/>
-          <p:cNvSpPr/>
-          <p:nvPr/>
-        </p:nvSpPr>
-        <p:spPr>
-          <a:xfrm>
-            <a:off x="3333750" y="3886200"/>
-            <a:ext cx="57150" cy="1066800"/>
-          </a:xfrm>
-          <a:prstGeom prst="rect">
-            <a:avLst/>
-          </a:prstGeom>
-          <a:solidFill>
-            <a:srgbClr val="2563EB"/>
-          </a:solidFill>
-          <a:ln>
-            <a:noFill/>
-          </a:ln>
-          <a:effectLst/>
-        </p:spPr>
-        <p:style>
-          <a:lnRef idx="1">
-            <a:schemeClr val="accent1"/>
-          </a:lnRef>
-          <a:fillRef idx="3">
-            <a:schemeClr val="accent1"/>
-          </a:fillRef>
-          <a:effectRef idx="2">
-            <a:schemeClr val="accent1"/>
-          </a:effectRef>
-          <a:fontRef idx="minor">
-            <a:schemeClr val="lt1"/>
-          </a:fontRef>
-        </p:style>
-        <p:txBody>
-          <a:bodyPr rtlCol="0" anchor="ctr"/>
-          <a:lstStyle/>
-          <a:p>
-            <a:pPr algn="ctr"/>
-          </a:p>
-        </p:txBody>
-      </p:sp>
-      <p:sp>
-        <p:nvSpPr>
-          <p:cNvPr id="20" name="TextBox 19"/>
-          <p:cNvSpPr txBox="1"/>
-          <p:nvPr/>
-        </p:nvSpPr>
-        <p:spPr>
-          <a:xfrm>
-            <a:off x="3524250" y="3886200"/>
-            <a:ext cx="2099310" cy="1066800"/>
-          </a:xfrm>
-          <a:prstGeom prst="rect">
-            <a:avLst/>
-          </a:prstGeom>
-          <a:noFill/>
-        </p:spPr>
-        <p:txBody>
-          <a:bodyPr wrap="square" anchor="ctr">
-            <a:spAutoFit/>
-          </a:bodyPr>
-          <a:lstStyle/>
-          <a:p>
-            <a:pPr algn="l">
-              <a:lnSpc>
-                <a:spcPct val="100000"/>
-              </a:lnSpc>
-            </a:pPr>
-            <a:r>
-              <a:rPr sz="1600" b="1">
-                <a:solidFill>
-                  <a:srgbClr val="2563EB"/>
-                </a:solidFill>
-                <a:latin typeface="PingFang SC"/>
-              </a:rPr>
-              <a:t>L1 进程内 LRU</a:t>
-            </a:r>
-          </a:p>
-        </p:txBody>
-      </p:sp>
-      <p:sp>
-        <p:nvSpPr>
-          <p:cNvPr id="21" name="TextBox 20"/>
-          <p:cNvSpPr txBox="1"/>
-          <p:nvPr/>
-        </p:nvSpPr>
-        <p:spPr>
-          <a:xfrm>
-            <a:off x="5543550" y="3886200"/>
-            <a:ext cx="3204210" cy="1066800"/>
-          </a:xfrm>
-          <a:prstGeom prst="rect">
-            <a:avLst/>
-          </a:prstGeom>
-          <a:noFill/>
-        </p:spPr>
-        <p:txBody>
-          <a:bodyPr wrap="square" anchor="ctr">
-            <a:spAutoFit/>
-          </a:bodyPr>
-          <a:lstStyle/>
-          <a:p>
-            <a:pPr algn="l">
-              <a:lnSpc>
-                <a:spcPct val="100000"/>
-              </a:lnSpc>
-            </a:pPr>
-            <a:r>
-              <a:rPr sz="1200" b="0">
-                <a:solidFill>
-                  <a:srgbClr val="475569"/>
-                </a:solidFill>
-                <a:latin typeface="PingFang SC"/>
-              </a:rPr>
-              <a:t>纳秒级(容量按热点)|Tool Result Cache:幂等读 60s|层级自底向上加速</a:t>
-            </a:r>
-          </a:p>
-        </p:txBody>
-      </p:sp>
-      <p:sp>
-        <p:nvSpPr>
-          <p:cNvPr id="22" name="TextBox 21"/>
-          <p:cNvSpPr txBox="1"/>
-          <p:nvPr/>
-        </p:nvSpPr>
-        <p:spPr>
-          <a:xfrm>
-            <a:off x="10287000" y="6534150"/>
-            <a:ext cx="1619250" cy="266700"/>
-          </a:xfrm>
-          <a:prstGeom prst="rect">
-            <a:avLst/>
-          </a:prstGeom>
-          <a:noFill/>
-        </p:spPr>
-        <p:txBody>
-          <a:bodyPr wrap="square" anchor="ctr">
-            <a:spAutoFit/>
-          </a:bodyPr>
-          <a:lstStyle/>
-          <a:p>
-            <a:pPr algn="r">
-              <a:lnSpc>
-                <a:spcPct val="100000"/>
-              </a:lnSpc>
-            </a:pPr>
-            <a:r>
               <a:rPr sz="900" b="0">
                 <a:solidFill>
                   <a:srgbClr val="94A3B8"/>
@@ -32921,7 +32980,7 @@
       </p:sp>
       <p:sp>
         <p:nvSpPr>
-          <p:cNvPr id="23" name="TextBox 22"/>
+          <p:cNvPr id="22" name="TextBox 21"/>
           <p:cNvSpPr txBox="1"/>
           <p:nvPr/>
         </p:nvSpPr>
@@ -35046,7 +35105,7 @@
                 </a:solidFill>
                 <a:latin typeface="PingFang SC"/>
               </a:rPr>
-              <a:t>5. 响应(标注 hit)|零改造成本,先开它</a:t>
+              <a:t>5. 响应(标注 hit)</a:t>
             </a:r>
           </a:p>
         </p:txBody>

--- a/03-课件PPT/讲次版/第6章-2-讲次 6-2 · 性能与成本优化.pptx
+++ b/03-课件PPT/讲次版/第6章-2-讲次 6-2 · 性能与成本优化.pptx
@@ -12147,8 +12147,8 @@
         </p:nvSpPr>
         <p:spPr>
           <a:xfrm>
-            <a:off x="3640137" y="2133600"/>
-            <a:ext cx="1543050" cy="285750"/>
+            <a:off x="3568700" y="2124075"/>
+            <a:ext cx="1685925" cy="304800"/>
           </a:xfrm>
           <a:prstGeom prst="roundRect">
             <a:avLst>
@@ -12195,8 +12195,8 @@
         </p:nvSpPr>
         <p:spPr>
           <a:xfrm>
-            <a:off x="3640137" y="2133600"/>
-            <a:ext cx="1543050" cy="285750"/>
+            <a:off x="3568700" y="2124075"/>
+            <a:ext cx="1685925" cy="304800"/>
           </a:xfrm>
           <a:prstGeom prst="rect">
             <a:avLst/>
@@ -12221,7 +12221,7 @@
                 </a:solidFill>
                 <a:latin typeface="PingFang SC"/>
               </a:rPr>
-              <a:t>主模型 42</a:t>
+              <a:t>主模型 429/5x</a:t>
             </a:r>
           </a:p>
         </p:txBody>
@@ -12313,8 +12313,8 @@
         </p:nvSpPr>
         <p:spPr>
           <a:xfrm>
-            <a:off x="6942137" y="2133600"/>
-            <a:ext cx="1543050" cy="285750"/>
+            <a:off x="6980237" y="2124075"/>
+            <a:ext cx="1466850" cy="304800"/>
           </a:xfrm>
           <a:prstGeom prst="roundRect">
             <a:avLst>
@@ -12361,8 +12361,8 @@
         </p:nvSpPr>
         <p:spPr>
           <a:xfrm>
-            <a:off x="6942137" y="2133600"/>
-            <a:ext cx="1543050" cy="285750"/>
+            <a:off x="6980237" y="2124075"/>
+            <a:ext cx="1466850" cy="304800"/>
           </a:xfrm>
           <a:prstGeom prst="rect">
             <a:avLst/>
@@ -12387,7 +12387,7 @@
                 </a:solidFill>
                 <a:latin typeface="PingFang SC"/>
               </a:rPr>
-              <a:t>fast 也</a:t>
+              <a:t>fast 也失败</a:t>
             </a:r>
           </a:p>
         </p:txBody>
@@ -12399,199 +12399,175 @@
           <p:nvPr/>
         </p:nvCxnSpPr>
         <p:spPr>
-          <a:xfrm flipV="1">
-            <a:off x="9398000" y="1562100"/>
-            <a:ext cx="0" cy="419100"/>
+          <a:xfrm>
+            <a:off x="3889375" y="3705225"/>
+            <a:ext cx="1044575" cy="0"/>
           </a:xfrm>
           <a:prstGeom prst="line">
             <a:avLst/>
           </a:prstGeom>
+          <a:ln w="19050">
+            <a:solidFill>
+              <a:srgbClr val="2563EB"/>
+            </a:solidFill>
+          </a:ln>
+        </p:spPr>
+        <p:style>
+          <a:lnRef idx="2">
+            <a:schemeClr val="accent1"/>
+          </a:lnRef>
+          <a:fillRef idx="0">
+            <a:schemeClr val="accent1"/>
+          </a:fillRef>
+          <a:effectRef idx="1">
+            <a:schemeClr val="accent1"/>
+          </a:effectRef>
+          <a:fontRef idx="minor">
+            <a:schemeClr val="tx1"/>
+          </a:fontRef>
+        </p:style>
+      </p:cxnSp>
+      <p:sp>
+        <p:nvSpPr>
+          <p:cNvPr id="24" name="Isosceles Triangle 23"/>
+          <p:cNvSpPr/>
+          <p:nvPr/>
+        </p:nvSpPr>
+        <p:spPr>
+          <a:xfrm rot="5400000">
+            <a:off x="4848226" y="3662363"/>
+            <a:ext cx="85725" cy="85725"/>
+          </a:xfrm>
+          <a:prstGeom prst="triangle">
+            <a:avLst/>
+          </a:prstGeom>
+          <a:solidFill>
+            <a:srgbClr val="2563EB"/>
+          </a:solidFill>
+          <a:ln>
+            <a:noFill/>
+          </a:ln>
+          <a:effectLst/>
+        </p:spPr>
+        <p:style>
+          <a:lnRef idx="1">
+            <a:schemeClr val="accent1"/>
+          </a:lnRef>
+          <a:fillRef idx="3">
+            <a:schemeClr val="accent1"/>
+          </a:fillRef>
+          <a:effectRef idx="2">
+            <a:schemeClr val="accent1"/>
+          </a:effectRef>
+          <a:fontRef idx="minor">
+            <a:schemeClr val="lt1"/>
+          </a:fontRef>
+        </p:style>
+        <p:txBody>
+          <a:bodyPr rtlCol="0" anchor="ctr"/>
+          <a:lstStyle/>
+          <a:p>
+            <a:pPr algn="ctr"/>
+          </a:p>
+        </p:txBody>
+      </p:sp>
+      <p:sp>
+        <p:nvSpPr>
+          <p:cNvPr id="25" name="Rounded Rectangle 24"/>
+          <p:cNvSpPr/>
+          <p:nvPr/>
+        </p:nvSpPr>
+        <p:spPr>
+          <a:xfrm>
+            <a:off x="3397250" y="3552825"/>
+            <a:ext cx="2028825" cy="304800"/>
+          </a:xfrm>
+          <a:prstGeom prst="roundRect">
+            <a:avLst>
+              <a:gd name="adj" fmla="val 8000"/>
+            </a:avLst>
+          </a:prstGeom>
+          <a:solidFill>
+            <a:srgbClr val="FFFFFF"/>
+          </a:solidFill>
           <a:ln w="12700">
             <a:solidFill>
               <a:srgbClr val="DDE5EE"/>
             </a:solidFill>
-            <a:prstDash val="dash"/>
-          </a:ln>
-          <a:effectLst/>
-        </p:spPr>
-        <p:style>
-          <a:lnRef idx="2">
-            <a:schemeClr val="accent1"/>
-          </a:lnRef>
-          <a:fillRef idx="0">
-            <a:schemeClr val="accent1"/>
-          </a:fillRef>
-          <a:effectRef idx="1">
-            <a:schemeClr val="accent1"/>
-          </a:effectRef>
-          <a:fontRef idx="minor">
-            <a:schemeClr val="tx1"/>
-          </a:fontRef>
-        </p:style>
-      </p:cxnSp>
-      <p:cxnSp>
-        <p:nvCxnSpPr>
-          <p:cNvPr id="24" name="Connector 23"/>
-          <p:cNvCxnSpPr/>
-          <p:nvPr/>
-        </p:nvCxnSpPr>
-        <p:spPr>
-          <a:xfrm flipH="1">
-            <a:off x="2794000" y="1562100"/>
-            <a:ext cx="6604000" cy="0"/>
-          </a:xfrm>
-          <a:prstGeom prst="line">
-            <a:avLst/>
-          </a:prstGeom>
-          <a:ln w="12700">
-            <a:solidFill>
-              <a:srgbClr val="DDE5EE"/>
-            </a:solidFill>
-            <a:prstDash val="dash"/>
-          </a:ln>
-          <a:effectLst/>
-        </p:spPr>
-        <p:style>
-          <a:lnRef idx="2">
-            <a:schemeClr val="accent1"/>
-          </a:lnRef>
-          <a:fillRef idx="0">
-            <a:schemeClr val="accent1"/>
-          </a:fillRef>
-          <a:effectRef idx="1">
-            <a:schemeClr val="accent1"/>
-          </a:effectRef>
-          <a:fontRef idx="minor">
-            <a:schemeClr val="tx1"/>
-          </a:fontRef>
-        </p:style>
-      </p:cxnSp>
-      <p:cxnSp>
-        <p:nvCxnSpPr>
-          <p:cNvPr id="25" name="Connector 24"/>
-          <p:cNvCxnSpPr/>
-          <p:nvPr/>
-        </p:nvCxnSpPr>
-        <p:spPr>
-          <a:xfrm>
-            <a:off x="2794000" y="1562100"/>
-            <a:ext cx="0" cy="1781175"/>
-          </a:xfrm>
-          <a:prstGeom prst="line">
-            <a:avLst/>
-          </a:prstGeom>
-          <a:ln w="12700">
-            <a:solidFill>
-              <a:srgbClr val="DDE5EE"/>
-            </a:solidFill>
-            <a:prstDash val="dash"/>
-          </a:ln>
-          <a:effectLst/>
-        </p:spPr>
-        <p:style>
-          <a:lnRef idx="2">
-            <a:schemeClr val="accent1"/>
-          </a:lnRef>
-          <a:fillRef idx="0">
-            <a:schemeClr val="accent1"/>
-          </a:fillRef>
-          <a:effectRef idx="1">
-            <a:schemeClr val="accent1"/>
-          </a:effectRef>
-          <a:fontRef idx="minor">
-            <a:schemeClr val="tx1"/>
-          </a:fontRef>
-        </p:style>
-      </p:cxnSp>
-      <p:cxnSp>
-        <p:nvCxnSpPr>
-          <p:cNvPr id="26" name="Connector 25"/>
-          <p:cNvCxnSpPr/>
-          <p:nvPr/>
-        </p:nvCxnSpPr>
-        <p:spPr>
-          <a:xfrm>
-            <a:off x="3889375" y="3705225"/>
-            <a:ext cx="1044575" cy="0"/>
-          </a:xfrm>
-          <a:prstGeom prst="line">
-            <a:avLst/>
-          </a:prstGeom>
-          <a:ln w="19050">
-            <a:solidFill>
-              <a:srgbClr val="2563EB"/>
-            </a:solidFill>
-          </a:ln>
-        </p:spPr>
-        <p:style>
-          <a:lnRef idx="2">
-            <a:schemeClr val="accent1"/>
-          </a:lnRef>
-          <a:fillRef idx="0">
-            <a:schemeClr val="accent1"/>
-          </a:fillRef>
-          <a:effectRef idx="1">
-            <a:schemeClr val="accent1"/>
-          </a:effectRef>
-          <a:fontRef idx="minor">
-            <a:schemeClr val="tx1"/>
-          </a:fontRef>
-        </p:style>
-      </p:cxnSp>
-      <p:sp>
-        <p:nvSpPr>
-          <p:cNvPr id="27" name="Isosceles Triangle 26"/>
-          <p:cNvSpPr/>
-          <p:nvPr/>
-        </p:nvSpPr>
-        <p:spPr>
-          <a:xfrm rot="5400000">
-            <a:off x="4848226" y="3662363"/>
-            <a:ext cx="85725" cy="85725"/>
-          </a:xfrm>
-          <a:prstGeom prst="triangle">
-            <a:avLst/>
-          </a:prstGeom>
-          <a:solidFill>
-            <a:srgbClr val="2563EB"/>
-          </a:solidFill>
-          <a:ln>
-            <a:noFill/>
-          </a:ln>
-          <a:effectLst/>
-        </p:spPr>
-        <p:style>
-          <a:lnRef idx="1">
-            <a:schemeClr val="accent1"/>
-          </a:lnRef>
-          <a:fillRef idx="3">
-            <a:schemeClr val="accent1"/>
-          </a:fillRef>
-          <a:effectRef idx="2">
-            <a:schemeClr val="accent1"/>
-          </a:effectRef>
-          <a:fontRef idx="minor">
-            <a:schemeClr val="lt1"/>
-          </a:fontRef>
-        </p:style>
-        <p:txBody>
-          <a:bodyPr rtlCol="0" anchor="ctr"/>
-          <a:lstStyle/>
-          <a:p>
-            <a:pPr algn="ctr"/>
-          </a:p>
-        </p:txBody>
-      </p:sp>
-      <p:sp>
-        <p:nvSpPr>
-          <p:cNvPr id="28" name="Rounded Rectangle 27"/>
-          <p:cNvSpPr/>
-          <p:nvPr/>
-        </p:nvSpPr>
-        <p:spPr>
-          <a:xfrm>
-            <a:off x="3640137" y="3562350"/>
-            <a:ext cx="1543050" cy="285750"/>
+          </a:ln>
+          <a:effectLst/>
+        </p:spPr>
+        <p:style>
+          <a:lnRef idx="1">
+            <a:schemeClr val="accent1"/>
+          </a:lnRef>
+          <a:fillRef idx="3">
+            <a:schemeClr val="accent1"/>
+          </a:fillRef>
+          <a:effectRef idx="2">
+            <a:schemeClr val="accent1"/>
+          </a:effectRef>
+          <a:fontRef idx="minor">
+            <a:schemeClr val="lt1"/>
+          </a:fontRef>
+        </p:style>
+        <p:txBody>
+          <a:bodyPr rtlCol="0" anchor="ctr"/>
+          <a:lstStyle/>
+          <a:p>
+            <a:pPr algn="ctr"/>
+          </a:p>
+        </p:txBody>
+      </p:sp>
+      <p:sp>
+        <p:nvSpPr>
+          <p:cNvPr id="26" name="TextBox 25"/>
+          <p:cNvSpPr txBox="1"/>
+          <p:nvPr/>
+        </p:nvSpPr>
+        <p:spPr>
+          <a:xfrm>
+            <a:off x="3397250" y="3552825"/>
+            <a:ext cx="2028825" cy="304800"/>
+          </a:xfrm>
+          <a:prstGeom prst="rect">
+            <a:avLst/>
+          </a:prstGeom>
+          <a:noFill/>
+        </p:spPr>
+        <p:txBody>
+          <a:bodyPr wrap="square" anchor="ctr">
+            <a:spAutoFit/>
+          </a:bodyPr>
+          <a:lstStyle/>
+          <a:p>
+            <a:pPr algn="ctr">
+              <a:lnSpc>
+                <a:spcPct val="100000"/>
+              </a:lnSpc>
+            </a:pPr>
+            <a:r>
+              <a:rPr sz="1100" b="1">
+                <a:solidFill>
+                  <a:srgbClr val="0B1D3A"/>
+                </a:solidFill>
+                <a:latin typeface="PingFang SC"/>
+              </a:rPr>
+              <a:t>全部熔断→人工兜底</a:t>
+            </a:r>
+          </a:p>
+        </p:txBody>
+      </p:sp>
+      <p:sp>
+        <p:nvSpPr>
+          <p:cNvPr id="27" name="Rounded Rectangle 26"/>
+          <p:cNvSpPr/>
+          <p:nvPr/>
+        </p:nvSpPr>
+        <p:spPr>
+          <a:xfrm>
+            <a:off x="1143000" y="6229350"/>
+            <a:ext cx="9906000" cy="381000"/>
           </a:xfrm>
           <a:prstGeom prst="roundRect">
             <a:avLst>
@@ -12599,79 +12575,77 @@
             </a:avLst>
           </a:prstGeom>
           <a:solidFill>
-            <a:srgbClr val="FFFFFF"/>
-          </a:solidFill>
-          <a:ln w="12700">
-            <a:solidFill>
-              <a:srgbClr val="DDE5EE"/>
-            </a:solidFill>
-          </a:ln>
-          <a:effectLst/>
-        </p:spPr>
-        <p:style>
-          <a:lnRef idx="1">
-            <a:schemeClr val="accent1"/>
-          </a:lnRef>
-          <a:fillRef idx="3">
-            <a:schemeClr val="accent1"/>
-          </a:fillRef>
-          <a:effectRef idx="2">
-            <a:schemeClr val="accent1"/>
-          </a:effectRef>
-          <a:fontRef idx="minor">
-            <a:schemeClr val="lt1"/>
-          </a:fontRef>
-        </p:style>
-        <p:txBody>
-          <a:bodyPr rtlCol="0" anchor="ctr"/>
-          <a:lstStyle/>
-          <a:p>
-            <a:pPr algn="ctr"/>
+            <a:srgbClr val="F1F5F9"/>
+          </a:solidFill>
+          <a:ln>
+            <a:noFill/>
+          </a:ln>
+          <a:effectLst/>
+        </p:spPr>
+        <p:style>
+          <a:lnRef idx="1">
+            <a:schemeClr val="accent1"/>
+          </a:lnRef>
+          <a:fillRef idx="3">
+            <a:schemeClr val="accent1"/>
+          </a:fillRef>
+          <a:effectRef idx="2">
+            <a:schemeClr val="accent1"/>
+          </a:effectRef>
+          <a:fontRef idx="minor">
+            <a:schemeClr val="lt1"/>
+          </a:fontRef>
+        </p:style>
+        <p:txBody>
+          <a:bodyPr rtlCol="0" anchor="ctr"/>
+          <a:lstStyle/>
+          <a:p>
+            <a:pPr algn="ctr"/>
+          </a:p>
+        </p:txBody>
+      </p:sp>
+      <p:sp>
+        <p:nvSpPr>
+          <p:cNvPr id="28" name="TextBox 27"/>
+          <p:cNvSpPr txBox="1"/>
+          <p:nvPr/>
+        </p:nvSpPr>
+        <p:spPr>
+          <a:xfrm>
+            <a:off x="1295400" y="6229350"/>
+            <a:ext cx="9601200" cy="381000"/>
+          </a:xfrm>
+          <a:prstGeom prst="rect">
+            <a:avLst/>
+          </a:prstGeom>
+          <a:noFill/>
+        </p:spPr>
+        <p:txBody>
+          <a:bodyPr wrap="square" anchor="ctr">
+            <a:spAutoFit/>
+          </a:bodyPr>
+          <a:lstStyle/>
+          <a:p>
+            <a:pPr algn="l">
+              <a:lnSpc>
+                <a:spcPct val="100000"/>
+              </a:lnSpc>
+            </a:pPr>
+            <a:r>
+              <a:rPr sz="1100" b="0">
+                <a:solidFill>
+                  <a:srgbClr val="475569"/>
+                </a:solidFill>
+                <a:latin typeface="PingFang SC"/>
+              </a:rPr>
+              <a:t>非相邻转移:FAST_FAIL → LOCAL</a:t>
+            </a:r>
           </a:p>
         </p:txBody>
       </p:sp>
       <p:sp>
         <p:nvSpPr>
           <p:cNvPr id="29" name="TextBox 28"/>
-          <p:cNvSpPr txBox="1"/>
-          <p:nvPr/>
-        </p:nvSpPr>
-        <p:spPr>
-          <a:xfrm>
-            <a:off x="3640137" y="3562350"/>
-            <a:ext cx="1543050" cy="285750"/>
-          </a:xfrm>
-          <a:prstGeom prst="rect">
-            <a:avLst/>
-          </a:prstGeom>
-          <a:noFill/>
-        </p:spPr>
-        <p:txBody>
-          <a:bodyPr wrap="square" anchor="ctr">
-            <a:spAutoFit/>
-          </a:bodyPr>
-          <a:lstStyle/>
-          <a:p>
-            <a:pPr algn="ctr">
-              <a:lnSpc>
-                <a:spcPct val="100000"/>
-              </a:lnSpc>
-            </a:pPr>
-            <a:r>
-              <a:rPr sz="1100" b="1">
-                <a:solidFill>
-                  <a:srgbClr val="0B1D3A"/>
-                </a:solidFill>
-                <a:latin typeface="PingFang SC"/>
-              </a:rPr>
-              <a:t>全部熔断→人</a:t>
-            </a:r>
-          </a:p>
-        </p:txBody>
-      </p:sp>
-      <p:sp>
-        <p:nvSpPr>
-          <p:cNvPr id="30" name="TextBox 29"/>
           <p:cNvSpPr txBox="1"/>
           <p:nvPr/>
         </p:nvSpPr>
@@ -12710,7 +12684,7 @@
       </p:sp>
       <p:sp>
         <p:nvSpPr>
-          <p:cNvPr id="31" name="TextBox 30"/>
+          <p:cNvPr id="30" name="TextBox 29"/>
           <p:cNvSpPr txBox="1"/>
           <p:nvPr/>
         </p:nvSpPr>
